--- a/presentation.pptx
+++ b/presentation.pptx
@@ -3204,7 +3204,7 @@
               </a:defRPr>
             </a:pPr>
             <a:r>
-              <a:t>Команда: Soup Optimizers  |  Спикер &amp; Автор: Тоғжан (Role 4: Құжаттама, Kaggle және Питч)</a:t>
+              <a:t>Команда: LunarTeam  |  Спикер &amp; Автор: Тоғжан (Role 4: Құжаттама, Kaggle және Питч)</a:t>
             </a:r>
           </a:p>
         </p:txBody>
@@ -5081,7 +5081,7 @@
             </a:r>
             <a:br/>
             <a:r>
-              <a:t>🔗 GitHub Repo: github.com/MakazhanAlpamys/soup-kernel-challenge (Commit: a90cb89)</a:t>
+              <a:t>🔗 GitHub Repo: github.com/ninumaki/SoupLunar</a:t>
             </a:r>
             <a:br/>
             <a:br/>

--- a/presentation.pptx
+++ b/presentation.pptx
@@ -5077,7 +5077,7 @@
             <a:br/>
             <a:br/>
             <a:r>
-              <a:t>🔗 Kaggle Public Run: kaggle.com/code/togzhan/soup-kernel-challenge-t4</a:t>
+              <a:t>🔗 Kaggle Public Run: kaggle.com/code/ruekdp/notebookd4dc02b276</a:t>
             </a:r>
             <a:br/>
             <a:r>

--- a/presentation.pptx
+++ b/presentation.pptx
@@ -3111,7 +3111,9 @@
             <a:srgbClr val="0F172A"/>
           </a:solidFill>
           <a:ln>
-            <a:noFill/>
+            <a:solidFill>
+              <a:srgbClr val="0F172A"/>
+            </a:solidFill>
           </a:ln>
         </p:spPr>
         <p:style>
@@ -3138,14 +3140,59 @@
       </p:sp>
       <p:sp>
         <p:nvSpPr>
-          <p:cNvPr id="3" name="TextBox 2"/>
+          <p:cNvPr id="3" name="Rounded Rectangle 2"/>
+          <p:cNvSpPr/>
+          <p:nvPr/>
+        </p:nvSpPr>
+        <p:spPr>
+          <a:xfrm>
+            <a:off x="731520" y="731520"/>
+            <a:ext cx="10728655" cy="5394960"/>
+          </a:xfrm>
+          <a:prstGeom prst="roundRect">
+            <a:avLst/>
+          </a:prstGeom>
+          <a:solidFill>
+            <a:srgbClr val="1E293B"/>
+          </a:solidFill>
+          <a:ln w="15240">
+            <a:solidFill>
+              <a:srgbClr val="334155"/>
+            </a:solidFill>
+          </a:ln>
+        </p:spPr>
+        <p:style>
+          <a:lnRef idx="1">
+            <a:schemeClr val="accent1"/>
+          </a:lnRef>
+          <a:fillRef idx="3">
+            <a:schemeClr val="accent1"/>
+          </a:fillRef>
+          <a:effectRef idx="2">
+            <a:schemeClr val="accent1"/>
+          </a:effectRef>
+          <a:fontRef idx="minor">
+            <a:schemeClr val="lt1"/>
+          </a:fontRef>
+        </p:style>
+        <p:txBody>
+          <a:bodyPr rtlCol="0" anchor="ctr"/>
+          <a:lstStyle/>
+          <a:p>
+            <a:pPr algn="ctr"/>
+          </a:p>
+        </p:txBody>
+      </p:sp>
+      <p:sp>
+        <p:nvSpPr>
+          <p:cNvPr id="4" name="TextBox 3"/>
           <p:cNvSpPr txBox="1"/>
           <p:nvPr/>
         </p:nvSpPr>
         <p:spPr>
           <a:xfrm>
-            <a:off x="914400" y="1645920"/>
-            <a:ext cx="10332720" cy="4114800"/>
+            <a:off x="1097280" y="1005840"/>
+            <a:ext cx="9966960" cy="4846320"/>
           </a:xfrm>
           <a:prstGeom prst="rect">
             <a:avLst/>
@@ -3163,48 +3210,102 @@
                 <a:solidFill>
                   <a:srgbClr val="06B6D4"/>
                 </a:solidFill>
-              </a:defRPr>
-            </a:pPr>
-            <a:r>
-              <a:t>DECENTRATHON 6.0 | SOUP KERNEL CHALLENGE</a:t>
-            </a:r>
-          </a:p>
-          <a:p>
-            <a:pPr>
-              <a:defRPr sz="3200" b="1">
+                <a:latin typeface="Arial"/>
+              </a:defRPr>
+            </a:pPr>
+            <a:r>
+              <a:t>DECENTRATHON 6.0 — SOUP KERNEL CHALLENGE</a:t>
+            </a:r>
+          </a:p>
+          <a:p>
+            <a:pPr>
+              <a:spcBef>
+                <a:spcPts val="800"/>
+              </a:spcBef>
+              <a:defRPr sz="2800" b="1">
                 <a:solidFill>
                   <a:srgbClr val="F8FAFC"/>
                 </a:solidFill>
-              </a:defRPr>
-            </a:pPr>
-            <a:r>
-              <a:t>Triton Кернелдері арқылы Qwen2.5 Fine-Tuning Жеделдету мен Жадты Үнемдеу</a:t>
+                <a:latin typeface="Arial"/>
+              </a:defRPr>
+            </a:pPr>
+            <a:r>
+              <a:t>Qwen2.5 Fine-Tuning: Triton Kernels &amp; VRAM Optimization</a:t>
+            </a:r>
+          </a:p>
+          <a:p>
+            <a:pPr>
+              <a:spcBef>
+                <a:spcPts val="600"/>
+              </a:spcBef>
+              <a:defRPr sz="1400">
+                <a:solidFill>
+                  <a:srgbClr val="10B981"/>
+                </a:solidFill>
+                <a:latin typeface="Arial"/>
+              </a:defRPr>
+            </a:pPr>
+            <a:r>
+              <a:t>Kaggle Tesla T4 (15GB): VRAM 2.27x үнемдеу (14.35 GB -&gt; 6.32 GB), 1.305x Speedup және 10/10 PASS</a:t>
             </a:r>
           </a:p>
           <a:p>
             <a:br/>
             <a:pPr>
-              <a:defRPr sz="1800">
-                <a:solidFill>
-                  <a:srgbClr val="94A3B8"/>
-                </a:solidFill>
-              </a:defRPr>
-            </a:pPr>
-            <a:r>
-              <a:t>Kaggle Tesla T4 GPU-да 2.5 ГБ VRAM үнемдеу және оқыту қадамдарын 1.35x жеделдету</a:t>
-            </a:r>
-          </a:p>
-          <a:p>
+              <a:defRPr sz="1500" b="1">
+                <a:solidFill>
+                  <a:srgbClr val="F8FAFC"/>
+                </a:solidFill>
+                <a:latin typeface="Arial"/>
+              </a:defRPr>
+            </a:pPr>
+            <a:r>
+              <a:t>Команда: LunarTeam</a:t>
+            </a:r>
+          </a:p>
+          <a:p>
+            <a:pPr>
+              <a:spcBef>
+                <a:spcPts val="800"/>
+              </a:spcBef>
+              <a:defRPr sz="1150">
+                <a:solidFill>
+                  <a:srgbClr val="E2E8F0"/>
+                </a:solidFill>
+                <a:latin typeface="Arial"/>
+              </a:defRPr>
+            </a:pPr>
+            <a:r>
+              <a:t>• Бекболат (Role 1): Техникалық Лид, Капитан &amp; GPU Kernel Архитекторы (Chunked CE &amp; NF4 Dequant)</a:t>
+            </a:r>
             <a:br/>
-            <a:pPr>
-              <a:defRPr sz="1400" b="1">
-                <a:solidFill>
-                  <a:srgbClr val="10B981"/>
-                </a:solidFill>
-              </a:defRPr>
-            </a:pPr>
-            <a:r>
-              <a:t>Команда: LunarTeam  |  Спикер &amp; Автор: Тоғжан (Role 4: Құжаттама, Kaggle және Питч)</a:t>
+            <a:r>
+              <a:t>• Тоғжан (Role 4): ML Research Engineer &amp; QA Lead (Convergence Math, VRAM Roofline &amp; Pitch)</a:t>
+            </a:r>
+            <a:br/>
+            <a:r>
+              <a:t>• Нұрдәулет (Role 2): Triton Element-Wise &amp; Model Kernels Инженері (RMSNorm, RoPE, SwiGLU)</a:t>
+            </a:r>
+            <a:br/>
+            <a:r>
+              <a:t>• Дархан (Role 3): Batch Optimization, Harness &amp; Тұрақтылық Инженері (Dynamic Padding, 79 Tests)</a:t>
+            </a:r>
+          </a:p>
+          <a:p>
+            <a:br/>
+            <a:pPr>
+              <a:spcBef>
+                <a:spcPts val="1000"/>
+              </a:spcBef>
+              <a:defRPr sz="1100" b="1">
+                <a:solidFill>
+                  <a:srgbClr val="06B6D4"/>
+                </a:solidFill>
+                <a:latin typeface="Arial"/>
+              </a:defRPr>
+            </a:pPr>
+            <a:r>
+              <a:t>🔗 GitHub: github.com/ninumaki/SoupLunar   |   🔗 Kaggle Notebook: kaggle.com/code/ruekdp/notebookd4dc02b276</a:t>
             </a:r>
           </a:p>
         </p:txBody>
@@ -3245,7 +3346,9 @@
             <a:srgbClr val="0F172A"/>
           </a:solidFill>
           <a:ln>
-            <a:noFill/>
+            <a:solidFill>
+              <a:srgbClr val="0F172A"/>
+            </a:solidFill>
           </a:ln>
         </p:spPr>
         <p:style>
@@ -3278,8 +3381,8 @@
         </p:nvSpPr>
         <p:spPr>
           <a:xfrm>
-            <a:off x="731520" y="457200"/>
-            <a:ext cx="10698480" cy="1097280"/>
+            <a:off x="731520" y="365760"/>
+            <a:ext cx="10698480" cy="1005840"/>
           </a:xfrm>
           <a:prstGeom prst="rect">
             <a:avLst/>
@@ -3287,7 +3390,7 @@
           <a:noFill/>
         </p:spPr>
         <p:txBody>
-          <a:bodyPr wrap="square">
+          <a:bodyPr wrap="square" lIns="0" tIns="0" rIns="0" bIns="0">
             <a:spAutoFit/>
           </a:bodyPr>
           <a:lstStyle/>
@@ -3297,18 +3400,23 @@
                 <a:solidFill>
                   <a:srgbClr val="06B6D4"/>
                 </a:solidFill>
-              </a:defRPr>
-            </a:pPr>
-            <a:r>
-              <a:t>SOUP KERNEL CHALLENGE | DECENTRATHON 6.0</a:t>
-            </a:r>
-          </a:p>
-          <a:p>
-            <a:pPr>
-              <a:defRPr sz="2600" b="1">
+                <a:latin typeface="Arial"/>
+              </a:defRPr>
+            </a:pPr>
+            <a:r>
+              <a:t>ТАЛДАУ ЖӘНЕ УЗКИЕ МЕСТА (PROFILING)</a:t>
+            </a:r>
+          </a:p>
+          <a:p>
+            <a:pPr>
+              <a:spcBef>
+                <a:spcPts val="400"/>
+              </a:spcBef>
+              <a:defRPr sz="2200" b="1">
                 <a:solidFill>
                   <a:srgbClr val="F8FAFC"/>
                 </a:solidFill>
+                <a:latin typeface="Arial"/>
               </a:defRPr>
             </a:pPr>
             <a:r>
@@ -3325,8 +3433,8 @@
         </p:nvSpPr>
         <p:spPr>
           <a:xfrm>
-            <a:off x="731520" y="1645920"/>
-            <a:ext cx="5120640" cy="4572000"/>
+            <a:off x="731520" y="1463040"/>
+            <a:ext cx="5212080" cy="4754880"/>
           </a:xfrm>
           <a:prstGeom prst="roundRect">
             <a:avLst/>
@@ -3334,7 +3442,3315 @@
           <a:solidFill>
             <a:srgbClr val="1E293B"/>
           </a:solidFill>
+          <a:ln w="15240">
+            <a:solidFill>
+              <a:srgbClr val="334155"/>
+            </a:solidFill>
+          </a:ln>
+        </p:spPr>
+        <p:style>
+          <a:lnRef idx="1">
+            <a:schemeClr val="accent1"/>
+          </a:lnRef>
+          <a:fillRef idx="3">
+            <a:schemeClr val="accent1"/>
+          </a:fillRef>
+          <a:effectRef idx="2">
+            <a:schemeClr val="accent1"/>
+          </a:effectRef>
+          <a:fontRef idx="minor">
+            <a:schemeClr val="lt1"/>
+          </a:fontRef>
+        </p:style>
+        <p:txBody>
+          <a:bodyPr rtlCol="0" anchor="ctr"/>
+          <a:lstStyle/>
+          <a:p>
+            <a:pPr algn="ctr"/>
+          </a:p>
+        </p:txBody>
+      </p:sp>
+      <p:sp>
+        <p:nvSpPr>
+          <p:cNvPr id="5" name="TextBox 4"/>
+          <p:cNvSpPr txBox="1"/>
+          <p:nvPr/>
+        </p:nvSpPr>
+        <p:spPr>
+          <a:xfrm>
+            <a:off x="914400" y="1645920"/>
+            <a:ext cx="4846320" cy="4389120"/>
+          </a:xfrm>
+          <a:prstGeom prst="rect">
+            <a:avLst/>
+          </a:prstGeom>
+          <a:noFill/>
+        </p:spPr>
+        <p:txBody>
+          <a:bodyPr wrap="square">
+            <a:spAutoFit/>
+          </a:bodyPr>
+          <a:lstStyle/>
+          <a:p>
+            <a:pPr>
+              <a:defRPr sz="1400" b="1">
+                <a:solidFill>
+                  <a:srgbClr val="06B6D4"/>
+                </a:solidFill>
+              </a:defRPr>
+            </a:pPr>
+            <a:r>
+              <a:t>Базалық Орындалу Профилі (Soup 0.77.0):</a:t>
+            </a:r>
+          </a:p>
+          <a:p>
+            <a:pPr>
+              <a:spcBef>
+                <a:spcPts val="500"/>
+              </a:spcBef>
+              <a:defRPr b="1" sz="1100">
+                <a:solidFill>
+                  <a:srgbClr val="F8FAFC"/>
+                </a:solidFill>
+              </a:defRPr>
+            </a:pPr>
+            <a:r>
+              <a:t>• 44% уақыт: Ұсақ элементтік операциялар: </a:t>
+            </a:r>
+          </a:p>
+          <a:p>
+            <a:pPr>
+              <a:defRPr sz="1000">
+                <a:solidFill>
+                  <a:srgbClr val="94A3B8"/>
+                </a:solidFill>
+              </a:defRPr>
+            </a:pPr>
+            <a:r>
+              <a:t>FP16 &lt;-&gt; FP32 casts, 57x RMSNorm, 28x SwiGLU, RoPE, LoRA қосулары.</a:t>
+            </a:r>
+          </a:p>
+          <a:p>
+            <a:pPr>
+              <a:spcBef>
+                <a:spcPts val="500"/>
+              </a:spcBef>
+              <a:defRPr b="1" sz="1100">
+                <a:solidFill>
+                  <a:srgbClr val="F8FAFC"/>
+                </a:solidFill>
+              </a:defRPr>
+            </a:pPr>
+            <a:r>
+              <a:t>• 36% уақыт: GEMM / MatMul: </a:t>
+            </a:r>
+          </a:p>
+          <a:p>
+            <a:pPr>
+              <a:defRPr sz="1000">
+                <a:solidFill>
+                  <a:srgbClr val="94A3B8"/>
+                </a:solidFill>
+              </a:defRPr>
+            </a:pPr>
+            <a:r>
+              <a:t>Сызықтық қабаттардың матрицалық көбейтулері.</a:t>
+            </a:r>
+          </a:p>
+          <a:p>
+            <a:pPr>
+              <a:spcBef>
+                <a:spcPts val="500"/>
+              </a:spcBef>
+              <a:defRPr b="1" sz="1100">
+                <a:solidFill>
+                  <a:srgbClr val="F8FAFC"/>
+                </a:solidFill>
+              </a:defRPr>
+            </a:pPr>
+            <a:r>
+              <a:t>• 7% уақыт: Cross-Entropy Loss &amp; Softmax: </a:t>
+            </a:r>
+          </a:p>
+          <a:p>
+            <a:pPr>
+              <a:defRPr sz="1000">
+                <a:solidFill>
+                  <a:srgbClr val="94A3B8"/>
+                </a:solidFill>
+              </a:defRPr>
+            </a:pPr>
+            <a:r>
+              <a:t>151,936 сөздік өлшемі бойынша логиттер мен градиенттер (VRAM шыңы!).</a:t>
+            </a:r>
+          </a:p>
+          <a:p>
+            <a:pPr>
+              <a:spcBef>
+                <a:spcPts val="500"/>
+              </a:spcBef>
+              <a:defRPr b="1" sz="1100">
+                <a:solidFill>
+                  <a:srgbClr val="F8FAFC"/>
+                </a:solidFill>
+              </a:defRPr>
+            </a:pPr>
+            <a:r>
+              <a:t>• 5% уақыт: NF4 салмақтарын декванттау: </a:t>
+            </a:r>
+          </a:p>
+          <a:p>
+            <a:pPr>
+              <a:defRPr sz="1000">
+                <a:solidFill>
+                  <a:srgbClr val="94A3B8"/>
+                </a:solidFill>
+              </a:defRPr>
+            </a:pPr>
+            <a:r>
+              <a:t>4-биттік салмақтарды әр қадамда absmax блоктарымен ашу.</a:t>
+            </a:r>
+          </a:p>
+          <a:p>
+            <a:pPr>
+              <a:spcBef>
+                <a:spcPts val="500"/>
+              </a:spcBef>
+              <a:defRPr b="1" sz="1100">
+                <a:solidFill>
+                  <a:srgbClr val="F8FAFC"/>
+                </a:solidFill>
+              </a:defRPr>
+            </a:pPr>
+            <a:r>
+              <a:t>• 5% уақыт: Attention блогы: </a:t>
+            </a:r>
+          </a:p>
+          <a:p>
+            <a:pPr>
+              <a:defRPr sz="1000">
+                <a:solidFill>
+                  <a:srgbClr val="94A3B8"/>
+                </a:solidFill>
+              </a:defRPr>
+            </a:pPr>
+            <a:r>
+              <a:t>Бос trailing pad токендерімен O(S^2) есептелуі.</a:t>
+            </a:r>
+          </a:p>
+          <a:p>
+            <a:pPr>
+              <a:spcBef>
+                <a:spcPts val="500"/>
+              </a:spcBef>
+              <a:defRPr b="1" sz="1100">
+                <a:solidFill>
+                  <a:srgbClr val="F8FAFC"/>
+                </a:solidFill>
+              </a:defRPr>
+            </a:pPr>
+            <a:r>
+              <a:t>• VRAM Tapshylygy (OOM қаупі):: </a:t>
+            </a:r>
+          </a:p>
+          <a:p>
+            <a:pPr>
+              <a:defRPr sz="1000">
+                <a:solidFill>
+                  <a:srgbClr val="94A3B8"/>
+                </a:solidFill>
+              </a:defRPr>
+            </a:pPr>
+            <a:r>
+              <a:t>Базалық жүйе қолжетімді 15,360 МиБ-тың 14,345 МиБ-ын (~93.4%) алады!</a:t>
+            </a:r>
+          </a:p>
+        </p:txBody>
+      </p:sp>
+      <p:sp>
+        <p:nvSpPr>
+          <p:cNvPr id="6" name="Rounded Rectangle 5"/>
+          <p:cNvSpPr/>
+          <p:nvPr/>
+        </p:nvSpPr>
+        <p:spPr>
+          <a:xfrm>
+            <a:off x="6217920" y="1463040"/>
+            <a:ext cx="5212080" cy="4754880"/>
+          </a:xfrm>
+          <a:prstGeom prst="roundRect">
+            <a:avLst/>
+          </a:prstGeom>
+          <a:solidFill>
+            <a:srgbClr val="1E293B"/>
+          </a:solidFill>
+          <a:ln w="15240">
+            <a:solidFill>
+              <a:srgbClr val="334155"/>
+            </a:solidFill>
+          </a:ln>
+        </p:spPr>
+        <p:style>
+          <a:lnRef idx="1">
+            <a:schemeClr val="accent1"/>
+          </a:lnRef>
+          <a:fillRef idx="3">
+            <a:schemeClr val="accent1"/>
+          </a:fillRef>
+          <a:effectRef idx="2">
+            <a:schemeClr val="accent1"/>
+          </a:effectRef>
+          <a:fontRef idx="minor">
+            <a:schemeClr val="lt1"/>
+          </a:fontRef>
+        </p:style>
+        <p:txBody>
+          <a:bodyPr rtlCol="0" anchor="ctr"/>
+          <a:lstStyle/>
+          <a:p>
+            <a:pPr algn="ctr"/>
+          </a:p>
+        </p:txBody>
+      </p:sp>
+      <p:sp>
+        <p:nvSpPr>
+          <p:cNvPr id="7" name="TextBox 6"/>
+          <p:cNvSpPr txBox="1"/>
+          <p:nvPr/>
+        </p:nvSpPr>
+        <p:spPr>
+          <a:xfrm>
+            <a:off x="6400800" y="1645920"/>
+            <a:ext cx="4846320" cy="4389120"/>
+          </a:xfrm>
+          <a:prstGeom prst="rect">
+            <a:avLst/>
+          </a:prstGeom>
+          <a:noFill/>
+        </p:spPr>
+        <p:txBody>
+          <a:bodyPr wrap="square">
+            <a:spAutoFit/>
+          </a:bodyPr>
+          <a:lstStyle/>
+          <a:p>
+            <a:pPr>
+              <a:defRPr sz="1400" b="1">
+                <a:solidFill>
+                  <a:srgbClr val="10B981"/>
+                </a:solidFill>
+              </a:defRPr>
+            </a:pPr>
+            <a:r>
+              <a:t>Неге осы операцияларды таңдадық?</a:t>
+            </a:r>
+          </a:p>
+          <a:p>
+            <a:pPr>
+              <a:spcBef>
+                <a:spcPts val="800"/>
+              </a:spcBef>
+              <a:defRPr b="1" sz="1100">
+                <a:solidFill>
+                  <a:srgbClr val="06B6D4"/>
+                </a:solidFill>
+              </a:defRPr>
+            </a:pPr>
+            <a:r>
+              <a:t>✔ Memory-Bandwidth Bound мәселесі:</a:t>
+            </a:r>
+          </a:p>
+          <a:p>
+            <a:pPr>
+              <a:defRPr sz="1050">
+                <a:solidFill>
+                  <a:srgbClr val="E2E8F0"/>
+                </a:solidFill>
+              </a:defRPr>
+            </a:pPr>
+            <a:r>
+              <a:t>Tesla T4 картасының жад өткізу қабілеті небәрі 320 ГБ/с. Элементтік операциялардың арифметикалық қарқындылығы өте төмен (I &lt;&lt; 10), уақыт HBM/DRAM-ға дерек тасуға кетеді.</a:t>
+            </a:r>
+          </a:p>
+          <a:p>
+            <a:pPr>
+              <a:spcBef>
+                <a:spcPts val="800"/>
+              </a:spcBef>
+              <a:defRPr b="1" sz="1100">
+                <a:solidFill>
+                  <a:srgbClr val="06B6D4"/>
+                </a:solidFill>
+              </a:defRPr>
+            </a:pPr>
+            <a:r>
+              <a:t>✔ SRAM On-Chip Fusion стратегиясы:</a:t>
+            </a:r>
+          </a:p>
+          <a:p>
+            <a:pPr>
+              <a:defRPr sz="1050">
+                <a:solidFill>
+                  <a:srgbClr val="E2E8F0"/>
+                </a:solidFill>
+              </a:defRPr>
+            </a:pPr>
+            <a:r>
+              <a:t>PyTorch бөлек CUDA кернелдерінің орнына, бірнеше амалды GPU-дың шапшаң ішкі жадында (SRAM/Registers) бір ғана I/O өтуімен орындау.</a:t>
+            </a:r>
+          </a:p>
+          <a:p>
+            <a:pPr>
+              <a:spcBef>
+                <a:spcPts val="800"/>
+              </a:spcBef>
+              <a:defRPr b="1" sz="1100">
+                <a:solidFill>
+                  <a:srgbClr val="06B6D4"/>
+                </a:solidFill>
+              </a:defRPr>
+            </a:pPr>
+            <a:r>
+              <a:t>✔ 1.24 GB Логиттер Тензорын Жою:</a:t>
+            </a:r>
+          </a:p>
+          <a:p>
+            <a:pPr>
+              <a:defRPr sz="1050">
+                <a:solidFill>
+                  <a:srgbClr val="E2E8F0"/>
+                </a:solidFill>
+              </a:defRPr>
+            </a:pPr>
+            <a:r>
+              <a:t>152k сөздік логиттерін жадта сақтамай, Online Softmax (LogSumExp) арқылы кернел ішінде есептеу VRAM шыңын түбегейлі шешеді.</a:t>
+            </a:r>
+          </a:p>
+          <a:p>
+            <a:pPr>
+              <a:spcBef>
+                <a:spcPts val="800"/>
+              </a:spcBef>
+              <a:defRPr b="1" sz="1100">
+                <a:solidFill>
+                  <a:srgbClr val="06B6D4"/>
+                </a:solidFill>
+              </a:defRPr>
+            </a:pPr>
+            <a:r>
+              <a:t>✔ Pad-Token Truncation арқылы -35% FLOPs:</a:t>
+            </a:r>
+          </a:p>
+          <a:p>
+            <a:pPr>
+              <a:defRPr sz="1050">
+                <a:solidFill>
+                  <a:srgbClr val="E2E8F0"/>
+                </a:solidFill>
+              </a:defRPr>
+            </a:pPr>
+            <a:r>
+              <a:t>Датасет ұзындығы ~220 токен. Батч ішіндегі артық паддингті кесу арқылы Attention көлемін 35%-ға қысқарту.</a:t>
+            </a:r>
+          </a:p>
+        </p:txBody>
+      </p:sp>
+    </p:spTree>
+  </p:cSld>
+  <p:clrMapOvr>
+    <a:masterClrMapping/>
+  </p:clrMapOvr>
+</p:sld>
+</file>
+
+<file path=ppt/slides/slide3.xml><?xml version="1.0" encoding="utf-8"?>
+<p:sld xmlns:a="http://schemas.openxmlformats.org/drawingml/2006/main" xmlns:p="http://schemas.openxmlformats.org/presentationml/2006/main" xmlns:r="http://schemas.openxmlformats.org/officeDocument/2006/relationships">
+  <p:cSld>
+    <p:spTree>
+      <p:nvGrpSpPr>
+        <p:cNvPr id="1" name=""/>
+        <p:cNvGrpSpPr/>
+        <p:nvPr/>
+      </p:nvGrpSpPr>
+      <p:grpSpPr/>
+      <p:sp>
+        <p:nvSpPr>
+          <p:cNvPr id="2" name="Rectangle 1"/>
+          <p:cNvSpPr/>
+          <p:nvPr/>
+        </p:nvSpPr>
+        <p:spPr>
+          <a:xfrm>
+            <a:off x="0" y="0"/>
+            <a:ext cx="12191695" cy="6858000"/>
+          </a:xfrm>
+          <a:prstGeom prst="rect">
+            <a:avLst/>
+          </a:prstGeom>
+          <a:solidFill>
+            <a:srgbClr val="0F172A"/>
+          </a:solidFill>
           <a:ln>
+            <a:solidFill>
+              <a:srgbClr val="0F172A"/>
+            </a:solidFill>
+          </a:ln>
+        </p:spPr>
+        <p:style>
+          <a:lnRef idx="1">
+            <a:schemeClr val="accent1"/>
+          </a:lnRef>
+          <a:fillRef idx="3">
+            <a:schemeClr val="accent1"/>
+          </a:fillRef>
+          <a:effectRef idx="2">
+            <a:schemeClr val="accent1"/>
+          </a:effectRef>
+          <a:fontRef idx="minor">
+            <a:schemeClr val="lt1"/>
+          </a:fontRef>
+        </p:style>
+        <p:txBody>
+          <a:bodyPr rtlCol="0" anchor="ctr"/>
+          <a:lstStyle/>
+          <a:p>
+            <a:pPr algn="ctr"/>
+          </a:p>
+        </p:txBody>
+      </p:sp>
+      <p:sp>
+        <p:nvSpPr>
+          <p:cNvPr id="3" name="TextBox 2"/>
+          <p:cNvSpPr txBox="1"/>
+          <p:nvPr/>
+        </p:nvSpPr>
+        <p:spPr>
+          <a:xfrm>
+            <a:off x="731520" y="365760"/>
+            <a:ext cx="10698480" cy="1005840"/>
+          </a:xfrm>
+          <a:prstGeom prst="rect">
+            <a:avLst/>
+          </a:prstGeom>
+          <a:noFill/>
+        </p:spPr>
+        <p:txBody>
+          <a:bodyPr wrap="square" lIns="0" tIns="0" rIns="0" bIns="0">
+            <a:spAutoFit/>
+          </a:bodyPr>
+          <a:lstStyle/>
+          <a:p>
+            <a:pPr>
+              <a:defRPr sz="1100" b="1">
+                <a:solidFill>
+                  <a:srgbClr val="06B6D4"/>
+                </a:solidFill>
+                <a:latin typeface="Arial"/>
+              </a:defRPr>
+            </a:pPr>
+            <a:r>
+              <a:t>АРХИТЕКТУРА ЖӘНЕ ТРИТОН КЕРНЕЛДЕРІ (@TRITON.JIT)</a:t>
+            </a:r>
+          </a:p>
+          <a:p>
+            <a:pPr>
+              <a:spcBef>
+                <a:spcPts val="400"/>
+              </a:spcBef>
+              <a:defRPr sz="2200" b="1">
+                <a:solidFill>
+                  <a:srgbClr val="F8FAFC"/>
+                </a:solidFill>
+                <a:latin typeface="Arial"/>
+              </a:defRPr>
+            </a:pPr>
+            <a:r>
+              <a:t>2-Сұрақ: Кернелдер қалай құрылған?</a:t>
+            </a:r>
+          </a:p>
+        </p:txBody>
+      </p:sp>
+      <p:sp>
+        <p:nvSpPr>
+          <p:cNvPr id="4" name="Rounded Rectangle 3"/>
+          <p:cNvSpPr/>
+          <p:nvPr/>
+        </p:nvSpPr>
+        <p:spPr>
+          <a:xfrm>
+            <a:off x="731520" y="1463040"/>
+            <a:ext cx="5212080" cy="2286000"/>
+          </a:xfrm>
+          <a:prstGeom prst="roundRect">
+            <a:avLst/>
+          </a:prstGeom>
+          <a:solidFill>
+            <a:srgbClr val="1E293B"/>
+          </a:solidFill>
+          <a:ln w="15240">
+            <a:solidFill>
+              <a:srgbClr val="334155"/>
+            </a:solidFill>
+          </a:ln>
+        </p:spPr>
+        <p:style>
+          <a:lnRef idx="1">
+            <a:schemeClr val="accent1"/>
+          </a:lnRef>
+          <a:fillRef idx="3">
+            <a:schemeClr val="accent1"/>
+          </a:fillRef>
+          <a:effectRef idx="2">
+            <a:schemeClr val="accent1"/>
+          </a:effectRef>
+          <a:fontRef idx="minor">
+            <a:schemeClr val="lt1"/>
+          </a:fontRef>
+        </p:style>
+        <p:txBody>
+          <a:bodyPr rtlCol="0" anchor="ctr"/>
+          <a:lstStyle/>
+          <a:p>
+            <a:pPr algn="ctr"/>
+          </a:p>
+        </p:txBody>
+      </p:sp>
+      <p:sp>
+        <p:nvSpPr>
+          <p:cNvPr id="5" name="TextBox 4"/>
+          <p:cNvSpPr txBox="1"/>
+          <p:nvPr/>
+        </p:nvSpPr>
+        <p:spPr>
+          <a:xfrm>
+            <a:off x="914400" y="1600200"/>
+            <a:ext cx="4846320" cy="2011680"/>
+          </a:xfrm>
+          <a:prstGeom prst="rect">
+            <a:avLst/>
+          </a:prstGeom>
+          <a:noFill/>
+        </p:spPr>
+        <p:txBody>
+          <a:bodyPr wrap="square">
+            <a:spAutoFit/>
+          </a:bodyPr>
+          <a:lstStyle/>
+          <a:p>
+            <a:pPr>
+              <a:defRPr b="1" sz="1300">
+                <a:solidFill>
+                  <a:srgbClr val="06B6D4"/>
+                </a:solidFill>
+              </a:defRPr>
+            </a:pPr>
+            <a:r>
+              <a:t>Fused Chunked Cross-Entropy</a:t>
+            </a:r>
+          </a:p>
+          <a:p>
+            <a:pPr>
+              <a:defRPr sz="950">
+                <a:solidFill>
+                  <a:srgbClr val="10B981"/>
+                </a:solidFill>
+              </a:defRPr>
+            </a:pPr>
+            <a:r>
+              <a:t>Файл: solution/fused_cross_entropy.py</a:t>
+            </a:r>
+          </a:p>
+          <a:p>
+            <a:pPr>
+              <a:spcBef>
+                <a:spcPts val="300"/>
+              </a:spcBef>
+              <a:defRPr sz="1000">
+                <a:solidFill>
+                  <a:srgbClr val="E2E8F0"/>
+                </a:solidFill>
+              </a:defRPr>
+            </a:pPr>
+            <a:r>
+              <a:t>• Online Softmax (LogSumExp) алгоритмі арқылы C=128 өлшемді чанктермен есептеледі.</a:t>
+            </a:r>
+            <a:br/>
+            <a:r>
+              <a:t>• [2048 x 151936] FP16 логиттер (1.24 GB) HBM-де сақталмайды -&gt; 77.8 MB буфер (93.7% үнемдеу!).</a:t>
+            </a:r>
+            <a:br/>
+            <a:r>
+              <a:t>• Streaming Shannon Entropy H(p) = LSE(z) - mean(z) және dlogits бір өтуде анықталады.</a:t>
+            </a:r>
+          </a:p>
+        </p:txBody>
+      </p:sp>
+      <p:sp>
+        <p:nvSpPr>
+          <p:cNvPr id="6" name="Rounded Rectangle 5"/>
+          <p:cNvSpPr/>
+          <p:nvPr/>
+        </p:nvSpPr>
+        <p:spPr>
+          <a:xfrm>
+            <a:off x="6217920" y="1463040"/>
+            <a:ext cx="5212080" cy="2286000"/>
+          </a:xfrm>
+          <a:prstGeom prst="roundRect">
+            <a:avLst/>
+          </a:prstGeom>
+          <a:solidFill>
+            <a:srgbClr val="1E293B"/>
+          </a:solidFill>
+          <a:ln w="15240">
+            <a:solidFill>
+              <a:srgbClr val="334155"/>
+            </a:solidFill>
+          </a:ln>
+        </p:spPr>
+        <p:style>
+          <a:lnRef idx="1">
+            <a:schemeClr val="accent1"/>
+          </a:lnRef>
+          <a:fillRef idx="3">
+            <a:schemeClr val="accent1"/>
+          </a:fillRef>
+          <a:effectRef idx="2">
+            <a:schemeClr val="accent1"/>
+          </a:effectRef>
+          <a:fontRef idx="minor">
+            <a:schemeClr val="lt1"/>
+          </a:fontRef>
+        </p:style>
+        <p:txBody>
+          <a:bodyPr rtlCol="0" anchor="ctr"/>
+          <a:lstStyle/>
+          <a:p>
+            <a:pPr algn="ctr"/>
+          </a:p>
+        </p:txBody>
+      </p:sp>
+      <p:sp>
+        <p:nvSpPr>
+          <p:cNvPr id="7" name="TextBox 6"/>
+          <p:cNvSpPr txBox="1"/>
+          <p:nvPr/>
+        </p:nvSpPr>
+        <p:spPr>
+          <a:xfrm>
+            <a:off x="6400800" y="1600200"/>
+            <a:ext cx="4846320" cy="2011680"/>
+          </a:xfrm>
+          <a:prstGeom prst="rect">
+            <a:avLst/>
+          </a:prstGeom>
+          <a:noFill/>
+        </p:spPr>
+        <p:txBody>
+          <a:bodyPr wrap="square">
+            <a:spAutoFit/>
+          </a:bodyPr>
+          <a:lstStyle/>
+          <a:p>
+            <a:pPr>
+              <a:defRPr b="1" sz="1300">
+                <a:solidFill>
+                  <a:srgbClr val="06B6D4"/>
+                </a:solidFill>
+              </a:defRPr>
+            </a:pPr>
+            <a:r>
+              <a:t>Fused RMSNorm (Forward + Backward)</a:t>
+            </a:r>
+          </a:p>
+          <a:p>
+            <a:pPr>
+              <a:defRPr sz="950">
+                <a:solidFill>
+                  <a:srgbClr val="10B981"/>
+                </a:solidFill>
+              </a:defRPr>
+            </a:pPr>
+            <a:r>
+              <a:t>Файл: solution/fused_rmsnorm.py</a:t>
+            </a:r>
+          </a:p>
+          <a:p>
+            <a:pPr>
+              <a:spcBef>
+                <a:spcPts val="300"/>
+              </a:spcBef>
+              <a:defRPr sz="1000">
+                <a:solidFill>
+                  <a:srgbClr val="E2E8F0"/>
+                </a:solidFill>
+              </a:defRPr>
+            </a:pPr>
+            <a:r>
+              <a:t>• PyTorch-тың 5 бөлек CUDA ядросының орнына 1 SRAM транзиті. BLOCK_SIZE=2048 &gt;= 1536.</a:t>
+            </a:r>
+            <a:br/>
+            <a:r>
+              <a:t>• Дисперсия мен rrms FP32 регистрлерінде жүреді; салмақпен көбейту тікелей чипте.</a:t>
+            </a:r>
+            <a:br/>
+            <a:r>
+              <a:t>• Backward кезінде dweight FP32-де жинақталып, градиент регрессиясы 0.00% деңгейінде сақталады.</a:t>
+            </a:r>
+          </a:p>
+        </p:txBody>
+      </p:sp>
+      <p:sp>
+        <p:nvSpPr>
+          <p:cNvPr id="8" name="Rounded Rectangle 7"/>
+          <p:cNvSpPr/>
+          <p:nvPr/>
+        </p:nvSpPr>
+        <p:spPr>
+          <a:xfrm>
+            <a:off x="731520" y="3931920"/>
+            <a:ext cx="5212080" cy="2286000"/>
+          </a:xfrm>
+          <a:prstGeom prst="roundRect">
+            <a:avLst/>
+          </a:prstGeom>
+          <a:solidFill>
+            <a:srgbClr val="1E293B"/>
+          </a:solidFill>
+          <a:ln w="15240">
+            <a:solidFill>
+              <a:srgbClr val="334155"/>
+            </a:solidFill>
+          </a:ln>
+        </p:spPr>
+        <p:style>
+          <a:lnRef idx="1">
+            <a:schemeClr val="accent1"/>
+          </a:lnRef>
+          <a:fillRef idx="3">
+            <a:schemeClr val="accent1"/>
+          </a:fillRef>
+          <a:effectRef idx="2">
+            <a:schemeClr val="accent1"/>
+          </a:effectRef>
+          <a:fontRef idx="minor">
+            <a:schemeClr val="lt1"/>
+          </a:fontRef>
+        </p:style>
+        <p:txBody>
+          <a:bodyPr rtlCol="0" anchor="ctr"/>
+          <a:lstStyle/>
+          <a:p>
+            <a:pPr algn="ctr"/>
+          </a:p>
+        </p:txBody>
+      </p:sp>
+      <p:sp>
+        <p:nvSpPr>
+          <p:cNvPr id="9" name="TextBox 8"/>
+          <p:cNvSpPr txBox="1"/>
+          <p:nvPr/>
+        </p:nvSpPr>
+        <p:spPr>
+          <a:xfrm>
+            <a:off x="914400" y="4069080"/>
+            <a:ext cx="4846320" cy="2011680"/>
+          </a:xfrm>
+          <a:prstGeom prst="rect">
+            <a:avLst/>
+          </a:prstGeom>
+          <a:noFill/>
+        </p:spPr>
+        <p:txBody>
+          <a:bodyPr wrap="square">
+            <a:spAutoFit/>
+          </a:bodyPr>
+          <a:lstStyle/>
+          <a:p>
+            <a:pPr>
+              <a:defRPr b="1" sz="1300">
+                <a:solidFill>
+                  <a:srgbClr val="06B6D4"/>
+                </a:solidFill>
+              </a:defRPr>
+            </a:pPr>
+            <a:r>
+              <a:t>Fast 4-bit NF4 Dequantization</a:t>
+            </a:r>
+          </a:p>
+          <a:p>
+            <a:pPr>
+              <a:defRPr sz="950">
+                <a:solidFill>
+                  <a:srgbClr val="10B981"/>
+                </a:solidFill>
+              </a:defRPr>
+            </a:pPr>
+            <a:r>
+              <a:t>Файл: solution/nf4_dequant.py</a:t>
+            </a:r>
+          </a:p>
+          <a:p>
+            <a:pPr>
+              <a:spcBef>
+                <a:spcPts val="300"/>
+              </a:spcBef>
+              <a:defRPr sz="1000">
+                <a:solidFill>
+                  <a:srgbClr val="E2E8F0"/>
+                </a:solidFill>
+              </a:defRPr>
+            </a:pPr>
+            <a:r>
+              <a:t>• 16-мәндік Bitsandbytes NF4 кестесі Triton регистріне бекітілген (Register LUT).</a:t>
+            </a:r>
+            <a:br/>
+            <a:r>
+              <a:t>• 4-биттік тығыз деректерді absmax блоктарымен бірге SRAM ішінде FP16-ға ашады (1.7x speedup).</a:t>
+            </a:r>
+          </a:p>
+        </p:txBody>
+      </p:sp>
+      <p:sp>
+        <p:nvSpPr>
+          <p:cNvPr id="10" name="Rounded Rectangle 9"/>
+          <p:cNvSpPr/>
+          <p:nvPr/>
+        </p:nvSpPr>
+        <p:spPr>
+          <a:xfrm>
+            <a:off x="6217920" y="3931920"/>
+            <a:ext cx="5212080" cy="2286000"/>
+          </a:xfrm>
+          <a:prstGeom prst="roundRect">
+            <a:avLst/>
+          </a:prstGeom>
+          <a:solidFill>
+            <a:srgbClr val="1E293B"/>
+          </a:solidFill>
+          <a:ln w="15240">
+            <a:solidFill>
+              <a:srgbClr val="334155"/>
+            </a:solidFill>
+          </a:ln>
+        </p:spPr>
+        <p:style>
+          <a:lnRef idx="1">
+            <a:schemeClr val="accent1"/>
+          </a:lnRef>
+          <a:fillRef idx="3">
+            <a:schemeClr val="accent1"/>
+          </a:fillRef>
+          <a:effectRef idx="2">
+            <a:schemeClr val="accent1"/>
+          </a:effectRef>
+          <a:fontRef idx="minor">
+            <a:schemeClr val="lt1"/>
+          </a:fontRef>
+        </p:style>
+        <p:txBody>
+          <a:bodyPr rtlCol="0" anchor="ctr"/>
+          <a:lstStyle/>
+          <a:p>
+            <a:pPr algn="ctr"/>
+          </a:p>
+        </p:txBody>
+      </p:sp>
+      <p:sp>
+        <p:nvSpPr>
+          <p:cNvPr id="11" name="TextBox 10"/>
+          <p:cNvSpPr txBox="1"/>
+          <p:nvPr/>
+        </p:nvSpPr>
+        <p:spPr>
+          <a:xfrm>
+            <a:off x="6400800" y="4069080"/>
+            <a:ext cx="4846320" cy="2011680"/>
+          </a:xfrm>
+          <a:prstGeom prst="rect">
+            <a:avLst/>
+          </a:prstGeom>
+          <a:noFill/>
+        </p:spPr>
+        <p:txBody>
+          <a:bodyPr wrap="square">
+            <a:spAutoFit/>
+          </a:bodyPr>
+          <a:lstStyle/>
+          <a:p>
+            <a:pPr>
+              <a:defRPr b="1" sz="1300">
+                <a:solidFill>
+                  <a:srgbClr val="06B6D4"/>
+                </a:solidFill>
+              </a:defRPr>
+            </a:pPr>
+            <a:r>
+              <a:t>Fused In-Place RoPE &amp; Dynamic Padding</a:t>
+            </a:r>
+          </a:p>
+          <a:p>
+            <a:pPr>
+              <a:defRPr sz="950">
+                <a:solidFill>
+                  <a:srgbClr val="10B981"/>
+                </a:solidFill>
+              </a:defRPr>
+            </a:pPr>
+            <a:r>
+              <a:t>Файл: solution/fused_rope.py &amp; dynamic_padding.py</a:t>
+            </a:r>
+          </a:p>
+          <a:p>
+            <a:pPr>
+              <a:spcBef>
+                <a:spcPts val="300"/>
+              </a:spcBef>
+              <a:defRPr sz="1000">
+                <a:solidFill>
+                  <a:srgbClr val="E2E8F0"/>
+                </a:solidFill>
+              </a:defRPr>
+            </a:pPr>
+            <a:r>
+              <a:t>• Q (12 heads) және K (2 heads) тензорларын жаңа жад бөлмей, страйдтық индекспен айналдыру.</a:t>
+            </a:r>
+            <a:br/>
+            <a:r>
+              <a:t>• Dynamic Pad Removal: Батчты нақты максималды өлшемге дейін қысқартып, O(S^2) attention көлемін 35%-ға азайтады.</a:t>
+            </a:r>
+          </a:p>
+        </p:txBody>
+      </p:sp>
+    </p:spTree>
+  </p:cSld>
+  <p:clrMapOvr>
+    <a:masterClrMapping/>
+  </p:clrMapOvr>
+</p:sld>
+</file>
+
+<file path=ppt/slides/slide4.xml><?xml version="1.0" encoding="utf-8"?>
+<p:sld xmlns:a="http://schemas.openxmlformats.org/drawingml/2006/main" xmlns:p="http://schemas.openxmlformats.org/presentationml/2006/main" xmlns:r="http://schemas.openxmlformats.org/officeDocument/2006/relationships">
+  <p:cSld>
+    <p:spTree>
+      <p:nvGrpSpPr>
+        <p:cNvPr id="1" name=""/>
+        <p:cNvGrpSpPr/>
+        <p:nvPr/>
+      </p:nvGrpSpPr>
+      <p:grpSpPr/>
+      <p:sp>
+        <p:nvSpPr>
+          <p:cNvPr id="2" name="Rectangle 1"/>
+          <p:cNvSpPr/>
+          <p:nvPr/>
+        </p:nvSpPr>
+        <p:spPr>
+          <a:xfrm>
+            <a:off x="0" y="0"/>
+            <a:ext cx="12191695" cy="6858000"/>
+          </a:xfrm>
+          <a:prstGeom prst="rect">
+            <a:avLst/>
+          </a:prstGeom>
+          <a:solidFill>
+            <a:srgbClr val="0F172A"/>
+          </a:solidFill>
+          <a:ln>
+            <a:solidFill>
+              <a:srgbClr val="0F172A"/>
+            </a:solidFill>
+          </a:ln>
+        </p:spPr>
+        <p:style>
+          <a:lnRef idx="1">
+            <a:schemeClr val="accent1"/>
+          </a:lnRef>
+          <a:fillRef idx="3">
+            <a:schemeClr val="accent1"/>
+          </a:fillRef>
+          <a:effectRef idx="2">
+            <a:schemeClr val="accent1"/>
+          </a:effectRef>
+          <a:fontRef idx="minor">
+            <a:schemeClr val="lt1"/>
+          </a:fontRef>
+        </p:style>
+        <p:txBody>
+          <a:bodyPr rtlCol="0" anchor="ctr"/>
+          <a:lstStyle/>
+          <a:p>
+            <a:pPr algn="ctr"/>
+          </a:p>
+        </p:txBody>
+      </p:sp>
+      <p:sp>
+        <p:nvSpPr>
+          <p:cNvPr id="3" name="TextBox 2"/>
+          <p:cNvSpPr txBox="1"/>
+          <p:nvPr/>
+        </p:nvSpPr>
+        <p:spPr>
+          <a:xfrm>
+            <a:off x="731520" y="365760"/>
+            <a:ext cx="10698480" cy="1005840"/>
+          </a:xfrm>
+          <a:prstGeom prst="rect">
+            <a:avLst/>
+          </a:prstGeom>
+          <a:noFill/>
+        </p:spPr>
+        <p:txBody>
+          <a:bodyPr wrap="square" lIns="0" tIns="0" rIns="0" bIns="0">
+            <a:spAutoFit/>
+          </a:bodyPr>
+          <a:lstStyle/>
+          <a:p>
+            <a:pPr>
+              <a:defRPr sz="1100" b="1">
+                <a:solidFill>
+                  <a:srgbClr val="06B6D4"/>
+                </a:solidFill>
+                <a:latin typeface="Arial"/>
+              </a:defRPr>
+            </a:pPr>
+            <a:r>
+              <a:t>РЕСМИ KAGGLE TESLA T4 БЕНЧМАРКІ (RUNS/RESULT.JSON)</a:t>
+            </a:r>
+          </a:p>
+          <a:p>
+            <a:pPr>
+              <a:spcBef>
+                <a:spcPts val="400"/>
+              </a:spcBef>
+              <a:defRPr sz="2200" b="1">
+                <a:solidFill>
+                  <a:srgbClr val="F8FAFC"/>
+                </a:solidFill>
+                <a:latin typeface="Arial"/>
+              </a:defRPr>
+            </a:pPr>
+            <a:r>
+              <a:t>3-Сұрақ: Базамен салыстырғандағы нәтижелер</a:t>
+            </a:r>
+          </a:p>
+        </p:txBody>
+      </p:sp>
+      <p:graphicFrame>
+        <p:nvGraphicFramePr>
+          <p:cNvPr id="4" name="Table 3"/>
+          <p:cNvGraphicFramePr>
+            <a:graphicFrameLocks noGrp="1"/>
+          </p:cNvGraphicFramePr>
+          <p:nvPr/>
+        </p:nvGraphicFramePr>
+        <p:xfrm>
+          <a:off x="731520" y="1463040"/>
+          <a:ext cx="10728655" cy="4114800"/>
+        </p:xfrm>
+        <a:graphic>
+          <a:graphicData uri="http://schemas.openxmlformats.org/drawingml/2006/table">
+            <a:tbl>
+              <a:tblPr firstRow="1" bandRow="1">
+                <a:tableStyleId>{5C22544A-7EE6-4342-B048-85BDC9FD1C3A}</a:tableStyleId>
+              </a:tblPr>
+              <a:tblGrid>
+                <a:gridCol w="2926080"/>
+                <a:gridCol w="2011680"/>
+                <a:gridCol w="2011680"/>
+                <a:gridCol w="1645920"/>
+                <a:gridCol w="2133295"/>
+              </a:tblGrid>
+              <a:tr h="411480">
+                <a:tc>
+                  <a:txBody>
+                    <a:bodyPr/>
+                    <a:lstStyle/>
+                    <a:p>
+                      <a:pPr algn="l">
+                        <a:defRPr sz="1050" b="1">
+                          <a:solidFill>
+                            <a:srgbClr val="F8FAFC"/>
+                          </a:solidFill>
+                          <a:latin typeface="Arial"/>
+                        </a:defRPr>
+                      </a:pPr>
+                      <a:r>
+                        <a:t>Метрика / Көрсеткіш</a:t>
+                      </a:r>
+                    </a:p>
+                  </a:txBody>
+                  <a:tcPr>
+                    <a:solidFill>
+                      <a:srgbClr val="0E7490"/>
+                    </a:solidFill>
+                  </a:tcPr>
+                </a:tc>
+                <a:tc>
+                  <a:txBody>
+                    <a:bodyPr/>
+                    <a:lstStyle/>
+                    <a:p>
+                      <a:pPr algn="ctr">
+                        <a:defRPr sz="1050" b="1">
+                          <a:solidFill>
+                            <a:srgbClr val="F8FAFC"/>
+                          </a:solidFill>
+                          <a:latin typeface="Arial"/>
+                        </a:defRPr>
+                      </a:pPr>
+                      <a:r>
+                        <a:t>Базалық Soup 0.77.0</a:t>
+                      </a:r>
+                    </a:p>
+                  </a:txBody>
+                  <a:tcPr>
+                    <a:solidFill>
+                      <a:srgbClr val="0E7490"/>
+                    </a:solidFill>
+                  </a:tcPr>
+                </a:tc>
+                <a:tc>
+                  <a:txBody>
+                    <a:bodyPr/>
+                    <a:lstStyle/>
+                    <a:p>
+                      <a:pPr algn="ctr">
+                        <a:defRPr sz="1050" b="1">
+                          <a:solidFill>
+                            <a:srgbClr val="F8FAFC"/>
+                          </a:solidFill>
+                          <a:latin typeface="Arial"/>
+                        </a:defRPr>
+                      </a:pPr>
+                      <a:r>
+                        <a:t>LunarTeam Шешімі</a:t>
+                      </a:r>
+                    </a:p>
+                  </a:txBody>
+                  <a:tcPr>
+                    <a:solidFill>
+                      <a:srgbClr val="0E7490"/>
+                    </a:solidFill>
+                  </a:tcPr>
+                </a:tc>
+                <a:tc>
+                  <a:txBody>
+                    <a:bodyPr/>
+                    <a:lstStyle/>
+                    <a:p>
+                      <a:pPr algn="ctr">
+                        <a:defRPr sz="1050" b="1">
+                          <a:solidFill>
+                            <a:srgbClr val="F8FAFC"/>
+                          </a:solidFill>
+                          <a:latin typeface="Arial"/>
+                        </a:defRPr>
+                      </a:pPr>
+                      <a:r>
+                        <a:t>Өзгеріс / Ratio</a:t>
+                      </a:r>
+                    </a:p>
+                  </a:txBody>
+                  <a:tcPr>
+                    <a:solidFill>
+                      <a:srgbClr val="0E7490"/>
+                    </a:solidFill>
+                  </a:tcPr>
+                </a:tc>
+                <a:tc>
+                  <a:txBody>
+                    <a:bodyPr/>
+                    <a:lstStyle/>
+                    <a:p>
+                      <a:pPr algn="ctr">
+                        <a:defRPr sz="1050" b="1">
+                          <a:solidFill>
+                            <a:srgbClr val="F8FAFC"/>
+                          </a:solidFill>
+                          <a:latin typeface="Arial"/>
+                        </a:defRPr>
+                      </a:pPr>
+                      <a:r>
+                        <a:t>Қорытынды</a:t>
+                      </a:r>
+                    </a:p>
+                  </a:txBody>
+                  <a:tcPr>
+                    <a:solidFill>
+                      <a:srgbClr val="0E7490"/>
+                    </a:solidFill>
+                  </a:tcPr>
+                </a:tc>
+              </a:tr>
+              <a:tr h="411480">
+                <a:tc>
+                  <a:txBody>
+                    <a:bodyPr/>
+                    <a:lstStyle/>
+                    <a:p>
+                      <a:pPr algn="l">
+                        <a:defRPr sz="1000" b="0">
+                          <a:solidFill>
+                            <a:srgbClr val="E2E8F0"/>
+                          </a:solidFill>
+                          <a:latin typeface="Arial"/>
+                        </a:defRPr>
+                      </a:pPr>
+                      <a:r>
+                        <a:t>Пиктік бейнежад (Peak VRAM)</a:t>
+                      </a:r>
+                    </a:p>
+                  </a:txBody>
+                  <a:tcPr>
+                    <a:solidFill>
+                      <a:srgbClr val="1E293B"/>
+                    </a:solidFill>
+                  </a:tcPr>
+                </a:tc>
+                <a:tc>
+                  <a:txBody>
+                    <a:bodyPr/>
+                    <a:lstStyle/>
+                    <a:p>
+                      <a:pPr algn="ctr">
+                        <a:defRPr sz="1000" b="0">
+                          <a:solidFill>
+                            <a:srgbClr val="E2E8F0"/>
+                          </a:solidFill>
+                          <a:latin typeface="Arial"/>
+                        </a:defRPr>
+                      </a:pPr>
+                      <a:r>
+                        <a:t>14,345 МиБ (14.35 GB)</a:t>
+                      </a:r>
+                    </a:p>
+                  </a:txBody>
+                  <a:tcPr>
+                    <a:solidFill>
+                      <a:srgbClr val="1E293B"/>
+                    </a:solidFill>
+                  </a:tcPr>
+                </a:tc>
+                <a:tc>
+                  <a:txBody>
+                    <a:bodyPr/>
+                    <a:lstStyle/>
+                    <a:p>
+                      <a:pPr algn="ctr">
+                        <a:defRPr sz="1000" b="1">
+                          <a:solidFill>
+                            <a:srgbClr val="E2E8F0"/>
+                          </a:solidFill>
+                          <a:latin typeface="Arial"/>
+                        </a:defRPr>
+                      </a:pPr>
+                      <a:r>
+                        <a:t>6,323 МиБ (6.32 GB)</a:t>
+                      </a:r>
+                    </a:p>
+                  </a:txBody>
+                  <a:tcPr>
+                    <a:solidFill>
+                      <a:srgbClr val="1E293B"/>
+                    </a:solidFill>
+                  </a:tcPr>
+                </a:tc>
+                <a:tc>
+                  <a:txBody>
+                    <a:bodyPr/>
+                    <a:lstStyle/>
+                    <a:p>
+                      <a:pPr algn="ctr">
+                        <a:defRPr sz="1000" b="1">
+                          <a:solidFill>
+                            <a:srgbClr val="10B981"/>
+                          </a:solidFill>
+                          <a:latin typeface="Arial"/>
+                        </a:defRPr>
+                      </a:pPr>
+                      <a:r>
+                        <a:t>Memory 2.269x</a:t>
+                      </a:r>
+                    </a:p>
+                  </a:txBody>
+                  <a:tcPr>
+                    <a:solidFill>
+                      <a:srgbClr val="1E293B"/>
+                    </a:solidFill>
+                  </a:tcPr>
+                </a:tc>
+                <a:tc>
+                  <a:txBody>
+                    <a:bodyPr/>
+                    <a:lstStyle/>
+                    <a:p>
+                      <a:pPr algn="ctr">
+                        <a:defRPr sz="1000" b="0">
+                          <a:solidFill>
+                            <a:srgbClr val="E2E8F0"/>
+                          </a:solidFill>
+                          <a:latin typeface="Arial"/>
+                        </a:defRPr>
+                      </a:pPr>
+                      <a:r>
+                        <a:t>🔥 8,022 МиБ (&gt;8 GB) үнемделді!</a:t>
+                      </a:r>
+                    </a:p>
+                  </a:txBody>
+                  <a:tcPr>
+                    <a:solidFill>
+                      <a:srgbClr val="1E293B"/>
+                    </a:solidFill>
+                  </a:tcPr>
+                </a:tc>
+              </a:tr>
+              <a:tr h="411480">
+                <a:tc>
+                  <a:txBody>
+                    <a:bodyPr/>
+                    <a:lstStyle/>
+                    <a:p>
+                      <a:pPr algn="l">
+                        <a:defRPr sz="1000" b="0">
+                          <a:solidFill>
+                            <a:srgbClr val="E2E8F0"/>
+                          </a:solidFill>
+                          <a:latin typeface="Arial"/>
+                        </a:defRPr>
+                      </a:pPr>
+                      <a:r>
+                        <a:t>Толық оқыту уақыты (soup train)</a:t>
+                      </a:r>
+                    </a:p>
+                  </a:txBody>
+                  <a:tcPr>
+                    <a:solidFill>
+                      <a:srgbClr val="182232"/>
+                    </a:solidFill>
+                  </a:tcPr>
+                </a:tc>
+                <a:tc>
+                  <a:txBody>
+                    <a:bodyPr/>
+                    <a:lstStyle/>
+                    <a:p>
+                      <a:pPr algn="ctr">
+                        <a:defRPr sz="1000" b="0">
+                          <a:solidFill>
+                            <a:srgbClr val="E2E8F0"/>
+                          </a:solidFill>
+                          <a:latin typeface="Arial"/>
+                        </a:defRPr>
+                      </a:pPr>
+                      <a:r>
+                        <a:t>84.11 с</a:t>
+                      </a:r>
+                    </a:p>
+                  </a:txBody>
+                  <a:tcPr>
+                    <a:solidFill>
+                      <a:srgbClr val="182232"/>
+                    </a:solidFill>
+                  </a:tcPr>
+                </a:tc>
+                <a:tc>
+                  <a:txBody>
+                    <a:bodyPr/>
+                    <a:lstStyle/>
+                    <a:p>
+                      <a:pPr algn="ctr">
+                        <a:defRPr sz="1000" b="1">
+                          <a:solidFill>
+                            <a:srgbClr val="E2E8F0"/>
+                          </a:solidFill>
+                          <a:latin typeface="Arial"/>
+                        </a:defRPr>
+                      </a:pPr>
+                      <a:r>
+                        <a:t>64.46 с</a:t>
+                      </a:r>
+                    </a:p>
+                  </a:txBody>
+                  <a:tcPr>
+                    <a:solidFill>
+                      <a:srgbClr val="182232"/>
+                    </a:solidFill>
+                  </a:tcPr>
+                </a:tc>
+                <a:tc>
+                  <a:txBody>
+                    <a:bodyPr/>
+                    <a:lstStyle/>
+                    <a:p>
+                      <a:pPr algn="ctr">
+                        <a:defRPr sz="1000" b="1">
+                          <a:solidFill>
+                            <a:srgbClr val="E2E8F0"/>
+                          </a:solidFill>
+                          <a:latin typeface="Arial"/>
+                        </a:defRPr>
+                      </a:pPr>
+                      <a:r>
+                        <a:t>Speedup 1.305x</a:t>
+                      </a:r>
+                    </a:p>
+                  </a:txBody>
+                  <a:tcPr>
+                    <a:solidFill>
+                      <a:srgbClr val="182232"/>
+                    </a:solidFill>
+                  </a:tcPr>
+                </a:tc>
+                <a:tc>
+                  <a:txBody>
+                    <a:bodyPr/>
+                    <a:lstStyle/>
+                    <a:p>
+                      <a:pPr algn="ctr">
+                        <a:defRPr sz="1000" b="0">
+                          <a:solidFill>
+                            <a:srgbClr val="E2E8F0"/>
+                          </a:solidFill>
+                          <a:latin typeface="Arial"/>
+                        </a:defRPr>
+                      </a:pPr>
+                      <a:r>
+                        <a:t>⚡ 20 секундқа жеделдеді!</a:t>
+                      </a:r>
+                    </a:p>
+                  </a:txBody>
+                  <a:tcPr>
+                    <a:solidFill>
+                      <a:srgbClr val="182232"/>
+                    </a:solidFill>
+                  </a:tcPr>
+                </a:tc>
+              </a:tr>
+              <a:tr h="411480">
+                <a:tc>
+                  <a:txBody>
+                    <a:bodyPr/>
+                    <a:lstStyle/>
+                    <a:p>
+                      <a:pPr algn="l">
+                        <a:defRPr sz="1000" b="0">
+                          <a:solidFill>
+                            <a:srgbClr val="E2E8F0"/>
+                          </a:solidFill>
+                          <a:latin typeface="Arial"/>
+                        </a:defRPr>
+                      </a:pPr>
+                      <a:r>
+                        <a:t>Өз Triton кернелдерінің үлесі</a:t>
+                      </a:r>
+                    </a:p>
+                  </a:txBody>
+                  <a:tcPr>
+                    <a:solidFill>
+                      <a:srgbClr val="1E293B"/>
+                    </a:solidFill>
+                  </a:tcPr>
+                </a:tc>
+                <a:tc>
+                  <a:txBody>
+                    <a:bodyPr/>
+                    <a:lstStyle/>
+                    <a:p>
+                      <a:pPr algn="ctr">
+                        <a:defRPr sz="1000" b="0">
+                          <a:solidFill>
+                            <a:srgbClr val="E2E8F0"/>
+                          </a:solidFill>
+                          <a:latin typeface="Arial"/>
+                        </a:defRPr>
+                      </a:pPr>
+                      <a:r>
+                        <a:t>0.0%</a:t>
+                      </a:r>
+                    </a:p>
+                  </a:txBody>
+                  <a:tcPr>
+                    <a:solidFill>
+                      <a:srgbClr val="1E293B"/>
+                    </a:solidFill>
+                  </a:tcPr>
+                </a:tc>
+                <a:tc>
+                  <a:txBody>
+                    <a:bodyPr/>
+                    <a:lstStyle/>
+                    <a:p>
+                      <a:pPr algn="ctr">
+                        <a:defRPr sz="1000" b="1">
+                          <a:solidFill>
+                            <a:srgbClr val="E2E8F0"/>
+                          </a:solidFill>
+                          <a:latin typeface="Arial"/>
+                        </a:defRPr>
+                      </a:pPr>
+                      <a:r>
+                        <a:t>10.1%</a:t>
+                      </a:r>
+                    </a:p>
+                  </a:txBody>
+                  <a:tcPr>
+                    <a:solidFill>
+                      <a:srgbClr val="1E293B"/>
+                    </a:solidFill>
+                  </a:tcPr>
+                </a:tc>
+                <a:tc>
+                  <a:txBody>
+                    <a:bodyPr/>
+                    <a:lstStyle/>
+                    <a:p>
+                      <a:pPr algn="ctr">
+                        <a:defRPr sz="1000" b="1">
+                          <a:solidFill>
+                            <a:srgbClr val="E2E8F0"/>
+                          </a:solidFill>
+                          <a:latin typeface="Arial"/>
+                        </a:defRPr>
+                      </a:pPr>
+                      <a:r>
+                        <a:t>Talap: &gt;= 5.0%</a:t>
+                      </a:r>
+                    </a:p>
+                  </a:txBody>
+                  <a:tcPr>
+                    <a:solidFill>
+                      <a:srgbClr val="1E293B"/>
+                    </a:solidFill>
+                  </a:tcPr>
+                </a:tc>
+                <a:tc>
+                  <a:txBody>
+                    <a:bodyPr/>
+                    <a:lstStyle/>
+                    <a:p>
+                      <a:pPr algn="ctr">
+                        <a:defRPr sz="1000" b="0">
+                          <a:solidFill>
+                            <a:srgbClr val="10B981"/>
+                          </a:solidFill>
+                          <a:latin typeface="Arial"/>
+                        </a:defRPr>
+                      </a:pPr>
+                      <a:r>
+                        <a:t>✅ Check 4 PASS (2 есе асты)</a:t>
+                      </a:r>
+                    </a:p>
+                  </a:txBody>
+                  <a:tcPr>
+                    <a:solidFill>
+                      <a:srgbClr val="1E293B"/>
+                    </a:solidFill>
+                  </a:tcPr>
+                </a:tc>
+              </a:tr>
+              <a:tr h="411480">
+                <a:tc>
+                  <a:txBody>
+                    <a:bodyPr/>
+                    <a:lstStyle/>
+                    <a:p>
+                      <a:pPr algn="l">
+                        <a:defRPr sz="1000" b="0">
+                          <a:solidFill>
+                            <a:srgbClr val="E2E8F0"/>
+                          </a:solidFill>
+                          <a:latin typeface="Arial"/>
+                        </a:defRPr>
+                      </a:pPr>
+                      <a:r>
+                        <a:t>1-қадамдағы Loss ауытқуы (ΔL1)</a:t>
+                      </a:r>
+                    </a:p>
+                  </a:txBody>
+                  <a:tcPr>
+                    <a:solidFill>
+                      <a:srgbClr val="182232"/>
+                    </a:solidFill>
+                  </a:tcPr>
+                </a:tc>
+                <a:tc>
+                  <a:txBody>
+                    <a:bodyPr/>
+                    <a:lstStyle/>
+                    <a:p>
+                      <a:pPr algn="ctr">
+                        <a:defRPr sz="1000" b="0">
+                          <a:solidFill>
+                            <a:srgbClr val="E2E8F0"/>
+                          </a:solidFill>
+                          <a:latin typeface="Arial"/>
+                        </a:defRPr>
+                      </a:pPr>
+                      <a:r>
+                        <a:t>2.05893</a:t>
+                      </a:r>
+                    </a:p>
+                  </a:txBody>
+                  <a:tcPr>
+                    <a:solidFill>
+                      <a:srgbClr val="182232"/>
+                    </a:solidFill>
+                  </a:tcPr>
+                </a:tc>
+                <a:tc>
+                  <a:txBody>
+                    <a:bodyPr/>
+                    <a:lstStyle/>
+                    <a:p>
+                      <a:pPr algn="ctr">
+                        <a:defRPr sz="1000" b="1">
+                          <a:solidFill>
+                            <a:srgbClr val="E2E8F0"/>
+                          </a:solidFill>
+                          <a:latin typeface="Arial"/>
+                        </a:defRPr>
+                      </a:pPr>
+                      <a:r>
+                        <a:t>2.05953</a:t>
+                      </a:r>
+                    </a:p>
+                  </a:txBody>
+                  <a:tcPr>
+                    <a:solidFill>
+                      <a:srgbClr val="182232"/>
+                    </a:solidFill>
+                  </a:tcPr>
+                </a:tc>
+                <a:tc>
+                  <a:txBody>
+                    <a:bodyPr/>
+                    <a:lstStyle/>
+                    <a:p>
+                      <a:pPr algn="ctr">
+                        <a:defRPr sz="1000" b="1">
+                          <a:solidFill>
+                            <a:srgbClr val="E2E8F0"/>
+                          </a:solidFill>
+                          <a:latin typeface="Arial"/>
+                        </a:defRPr>
+                      </a:pPr>
+                      <a:r>
+                        <a:t>Delta = 0.029%</a:t>
+                      </a:r>
+                    </a:p>
+                  </a:txBody>
+                  <a:tcPr>
+                    <a:solidFill>
+                      <a:srgbClr val="182232"/>
+                    </a:solidFill>
+                  </a:tcPr>
+                </a:tc>
+                <a:tc>
+                  <a:txBody>
+                    <a:bodyPr/>
+                    <a:lstStyle/>
+                    <a:p>
+                      <a:pPr algn="ctr">
+                        <a:defRPr sz="1000" b="0">
+                          <a:solidFill>
+                            <a:srgbClr val="10B981"/>
+                          </a:solidFill>
+                          <a:latin typeface="Arial"/>
+                        </a:defRPr>
+                      </a:pPr>
+                      <a:r>
+                        <a:t>✅ Check 6 PASS (&lt;= 1.0% шегі)</a:t>
+                      </a:r>
+                    </a:p>
+                  </a:txBody>
+                  <a:tcPr>
+                    <a:solidFill>
+                      <a:srgbClr val="182232"/>
+                    </a:solidFill>
+                  </a:tcPr>
+                </a:tc>
+              </a:tr>
+              <a:tr h="411480">
+                <a:tc>
+                  <a:txBody>
+                    <a:bodyPr/>
+                    <a:lstStyle/>
+                    <a:p>
+                      <a:pPr algn="l">
+                        <a:defRPr sz="1000" b="0">
+                          <a:solidFill>
+                            <a:srgbClr val="E2E8F0"/>
+                          </a:solidFill>
+                          <a:latin typeface="Arial"/>
+                        </a:defRPr>
+                      </a:pPr>
+                      <a:r>
+                        <a:t>64 қадамдық орташа Loss айырмасы</a:t>
+                      </a:r>
+                    </a:p>
+                  </a:txBody>
+                  <a:tcPr>
+                    <a:solidFill>
+                      <a:srgbClr val="1E293B"/>
+                    </a:solidFill>
+                  </a:tcPr>
+                </a:tc>
+                <a:tc>
+                  <a:txBody>
+                    <a:bodyPr/>
+                    <a:lstStyle/>
+                    <a:p>
+                      <a:pPr algn="ctr">
+                        <a:defRPr sz="1000" b="0">
+                          <a:solidFill>
+                            <a:srgbClr val="E2E8F0"/>
+                          </a:solidFill>
+                          <a:latin typeface="Arial"/>
+                        </a:defRPr>
+                      </a:pPr>
+                      <a:r>
+                        <a:t>0.00%</a:t>
+                      </a:r>
+                    </a:p>
+                  </a:txBody>
+                  <a:tcPr>
+                    <a:solidFill>
+                      <a:srgbClr val="1E293B"/>
+                    </a:solidFill>
+                  </a:tcPr>
+                </a:tc>
+                <a:tc>
+                  <a:txBody>
+                    <a:bodyPr/>
+                    <a:lstStyle/>
+                    <a:p>
+                      <a:pPr algn="ctr">
+                        <a:defRPr sz="1000" b="1">
+                          <a:solidFill>
+                            <a:srgbClr val="E2E8F0"/>
+                          </a:solidFill>
+                          <a:latin typeface="Arial"/>
+                        </a:defRPr>
+                      </a:pPr>
+                      <a:r>
+                        <a:t>0.058%</a:t>
+                      </a:r>
+                    </a:p>
+                  </a:txBody>
+                  <a:tcPr>
+                    <a:solidFill>
+                      <a:srgbClr val="1E293B"/>
+                    </a:solidFill>
+                  </a:tcPr>
+                </a:tc>
+                <a:tc>
+                  <a:txBody>
+                    <a:bodyPr/>
+                    <a:lstStyle/>
+                    <a:p>
+                      <a:pPr algn="ctr">
+                        <a:defRPr sz="1000" b="1">
+                          <a:solidFill>
+                            <a:srgbClr val="E2E8F0"/>
+                          </a:solidFill>
+                          <a:latin typeface="Arial"/>
+                        </a:defRPr>
+                      </a:pPr>
+                      <a:r>
+                        <a:t>Delta = 0.058%</a:t>
+                      </a:r>
+                    </a:p>
+                  </a:txBody>
+                  <a:tcPr>
+                    <a:solidFill>
+                      <a:srgbClr val="1E293B"/>
+                    </a:solidFill>
+                  </a:tcPr>
+                </a:tc>
+                <a:tc>
+                  <a:txBody>
+                    <a:bodyPr/>
+                    <a:lstStyle/>
+                    <a:p>
+                      <a:pPr algn="ctr">
+                        <a:defRPr sz="1000" b="0">
+                          <a:solidFill>
+                            <a:srgbClr val="10B981"/>
+                          </a:solidFill>
+                          <a:latin typeface="Arial"/>
+                        </a:defRPr>
+                      </a:pPr>
+                      <a:r>
+                        <a:t>✅ Check 6 PASS (&lt;= 3.0% шегі)</a:t>
+                      </a:r>
+                    </a:p>
+                  </a:txBody>
+                  <a:tcPr>
+                    <a:solidFill>
+                      <a:srgbClr val="1E293B"/>
+                    </a:solidFill>
+                  </a:tcPr>
+                </a:tc>
+              </a:tr>
+              <a:tr h="411480">
+                <a:tc>
+                  <a:txBody>
+                    <a:bodyPr/>
+                    <a:lstStyle/>
+                    <a:p>
+                      <a:pPr algn="l">
+                        <a:defRPr sz="1000" b="0">
+                          <a:solidFill>
+                            <a:srgbClr val="E2E8F0"/>
+                          </a:solidFill>
+                          <a:latin typeface="Arial"/>
+                        </a:defRPr>
+                      </a:pPr>
+                      <a:r>
+                        <a:t>Streaming Shannon Entropy айырмасы</a:t>
+                      </a:r>
+                    </a:p>
+                  </a:txBody>
+                  <a:tcPr>
+                    <a:solidFill>
+                      <a:srgbClr val="182232"/>
+                    </a:solidFill>
+                  </a:tcPr>
+                </a:tc>
+                <a:tc>
+                  <a:txBody>
+                    <a:bodyPr/>
+                    <a:lstStyle/>
+                    <a:p>
+                      <a:pPr algn="ctr">
+                        <a:defRPr sz="1000" b="0">
+                          <a:solidFill>
+                            <a:srgbClr val="E2E8F0"/>
+                          </a:solidFill>
+                          <a:latin typeface="Arial"/>
+                        </a:defRPr>
+                      </a:pPr>
+                      <a:r>
+                        <a:t>0.00%</a:t>
+                      </a:r>
+                    </a:p>
+                  </a:txBody>
+                  <a:tcPr>
+                    <a:solidFill>
+                      <a:srgbClr val="182232"/>
+                    </a:solidFill>
+                  </a:tcPr>
+                </a:tc>
+                <a:tc>
+                  <a:txBody>
+                    <a:bodyPr/>
+                    <a:lstStyle/>
+                    <a:p>
+                      <a:pPr algn="ctr">
+                        <a:defRPr sz="1000" b="1">
+                          <a:solidFill>
+                            <a:srgbClr val="E2E8F0"/>
+                          </a:solidFill>
+                          <a:latin typeface="Arial"/>
+                        </a:defRPr>
+                      </a:pPr>
+                      <a:r>
+                        <a:t>0.216%</a:t>
+                      </a:r>
+                    </a:p>
+                  </a:txBody>
+                  <a:tcPr>
+                    <a:solidFill>
+                      <a:srgbClr val="182232"/>
+                    </a:solidFill>
+                  </a:tcPr>
+                </a:tc>
+                <a:tc>
+                  <a:txBody>
+                    <a:bodyPr/>
+                    <a:lstStyle/>
+                    <a:p>
+                      <a:pPr algn="ctr">
+                        <a:defRPr sz="1000" b="1">
+                          <a:solidFill>
+                            <a:srgbClr val="E2E8F0"/>
+                          </a:solidFill>
+                          <a:latin typeface="Arial"/>
+                        </a:defRPr>
+                      </a:pPr>
+                      <a:r>
+                        <a:t>Delta = 0.216%</a:t>
+                      </a:r>
+                    </a:p>
+                  </a:txBody>
+                  <a:tcPr>
+                    <a:solidFill>
+                      <a:srgbClr val="182232"/>
+                    </a:solidFill>
+                  </a:tcPr>
+                </a:tc>
+                <a:tc>
+                  <a:txBody>
+                    <a:bodyPr/>
+                    <a:lstStyle/>
+                    <a:p>
+                      <a:pPr algn="ctr">
+                        <a:defRPr sz="1000" b="0">
+                          <a:solidFill>
+                            <a:srgbClr val="10B981"/>
+                          </a:solidFill>
+                          <a:latin typeface="Arial"/>
+                        </a:defRPr>
+                      </a:pPr>
+                      <a:r>
+                        <a:t>✅ Check 5 PASS (&lt;= 3.0% шегі)</a:t>
+                      </a:r>
+                    </a:p>
+                  </a:txBody>
+                  <a:tcPr>
+                    <a:solidFill>
+                      <a:srgbClr val="182232"/>
+                    </a:solidFill>
+                  </a:tcPr>
+                </a:tc>
+              </a:tr>
+              <a:tr h="411480">
+                <a:tc>
+                  <a:txBody>
+                    <a:bodyPr/>
+                    <a:lstStyle/>
+                    <a:p>
+                      <a:pPr algn="l">
+                        <a:defRPr sz="1000" b="0">
+                          <a:solidFill>
+                            <a:srgbClr val="E2E8F0"/>
+                          </a:solidFill>
+                          <a:latin typeface="Arial"/>
+                        </a:defRPr>
+                      </a:pPr>
+                      <a:r>
+                        <a:t>Eval Loss (Жасырын қатарлар)</a:t>
+                      </a:r>
+                    </a:p>
+                  </a:txBody>
+                  <a:tcPr>
+                    <a:solidFill>
+                      <a:srgbClr val="1E293B"/>
+                    </a:solidFill>
+                  </a:tcPr>
+                </a:tc>
+                <a:tc>
+                  <a:txBody>
+                    <a:bodyPr/>
+                    <a:lstStyle/>
+                    <a:p>
+                      <a:pPr algn="ctr">
+                        <a:defRPr sz="1000" b="0">
+                          <a:solidFill>
+                            <a:srgbClr val="E2E8F0"/>
+                          </a:solidFill>
+                          <a:latin typeface="Arial"/>
+                        </a:defRPr>
+                      </a:pPr>
+                      <a:r>
+                        <a:t>2.04967</a:t>
+                      </a:r>
+                    </a:p>
+                  </a:txBody>
+                  <a:tcPr>
+                    <a:solidFill>
+                      <a:srgbClr val="1E293B"/>
+                    </a:solidFill>
+                  </a:tcPr>
+                </a:tc>
+                <a:tc>
+                  <a:txBody>
+                    <a:bodyPr/>
+                    <a:lstStyle/>
+                    <a:p>
+                      <a:pPr algn="ctr">
+                        <a:defRPr sz="1000" b="1">
+                          <a:solidFill>
+                            <a:srgbClr val="E2E8F0"/>
+                          </a:solidFill>
+                          <a:latin typeface="Arial"/>
+                        </a:defRPr>
+                      </a:pPr>
+                      <a:r>
+                        <a:t>2.04956</a:t>
+                      </a:r>
+                    </a:p>
+                  </a:txBody>
+                  <a:tcPr>
+                    <a:solidFill>
+                      <a:srgbClr val="1E293B"/>
+                    </a:solidFill>
+                  </a:tcPr>
+                </a:tc>
+                <a:tc>
+                  <a:txBody>
+                    <a:bodyPr/>
+                    <a:lstStyle/>
+                    <a:p>
+                      <a:pPr algn="ctr">
+                        <a:defRPr sz="1000" b="1">
+                          <a:solidFill>
+                            <a:srgbClr val="E2E8F0"/>
+                          </a:solidFill>
+                          <a:latin typeface="Arial"/>
+                        </a:defRPr>
+                      </a:pPr>
+                      <a:r>
+                        <a:t>Delta = -0.005%</a:t>
+                      </a:r>
+                    </a:p>
+                  </a:txBody>
+                  <a:tcPr>
+                    <a:solidFill>
+                      <a:srgbClr val="1E293B"/>
+                    </a:solidFill>
+                  </a:tcPr>
+                </a:tc>
+                <a:tc>
+                  <a:txBody>
+                    <a:bodyPr/>
+                    <a:lstStyle/>
+                    <a:p>
+                      <a:pPr algn="ctr">
+                        <a:defRPr sz="1000" b="0">
+                          <a:solidFill>
+                            <a:srgbClr val="10B981"/>
+                          </a:solidFill>
+                          <a:latin typeface="Arial"/>
+                        </a:defRPr>
+                      </a:pPr>
+                      <a:r>
+                        <a:t>💎 Check 7 PASS (Сапа жақсарды)</a:t>
+                      </a:r>
+                    </a:p>
+                  </a:txBody>
+                  <a:tcPr>
+                    <a:solidFill>
+                      <a:srgbClr val="1E293B"/>
+                    </a:solidFill>
+                  </a:tcPr>
+                </a:tc>
+              </a:tr>
+              <a:tr h="411480">
+                <a:tc>
+                  <a:txBody>
+                    <a:bodyPr/>
+                    <a:lstStyle/>
+                    <a:p>
+                      <a:pPr algn="l">
+                        <a:defRPr sz="1000" b="0">
+                          <a:solidFill>
+                            <a:srgbClr val="E2E8F0"/>
+                          </a:solidFill>
+                          <a:latin typeface="Arial"/>
+                        </a:defRPr>
+                      </a:pPr>
+                      <a:r>
+                        <a:t>Soup регрессиялық тесттері</a:t>
+                      </a:r>
+                    </a:p>
+                  </a:txBody>
+                  <a:tcPr>
+                    <a:solidFill>
+                      <a:srgbClr val="182232"/>
+                    </a:solidFill>
+                  </a:tcPr>
+                </a:tc>
+                <a:tc>
+                  <a:txBody>
+                    <a:bodyPr/>
+                    <a:lstStyle/>
+                    <a:p>
+                      <a:pPr algn="ctr">
+                        <a:defRPr sz="1000" b="0">
+                          <a:solidFill>
+                            <a:srgbClr val="E2E8F0"/>
+                          </a:solidFill>
+                          <a:latin typeface="Arial"/>
+                        </a:defRPr>
+                      </a:pPr>
+                      <a:r>
+                        <a:t>79 passed</a:t>
+                      </a:r>
+                    </a:p>
+                  </a:txBody>
+                  <a:tcPr>
+                    <a:solidFill>
+                      <a:srgbClr val="182232"/>
+                    </a:solidFill>
+                  </a:tcPr>
+                </a:tc>
+                <a:tc>
+                  <a:txBody>
+                    <a:bodyPr/>
+                    <a:lstStyle/>
+                    <a:p>
+                      <a:pPr algn="ctr">
+                        <a:defRPr sz="1000" b="1">
+                          <a:solidFill>
+                            <a:srgbClr val="E2E8F0"/>
+                          </a:solidFill>
+                          <a:latin typeface="Arial"/>
+                        </a:defRPr>
+                      </a:pPr>
+                      <a:r>
+                        <a:t>79 passed in 0.50s</a:t>
+                      </a:r>
+                    </a:p>
+                  </a:txBody>
+                  <a:tcPr>
+                    <a:solidFill>
+                      <a:srgbClr val="182232"/>
+                    </a:solidFill>
+                  </a:tcPr>
+                </a:tc>
+                <a:tc>
+                  <a:txBody>
+                    <a:bodyPr/>
+                    <a:lstStyle/>
+                    <a:p>
+                      <a:pPr algn="ctr">
+                        <a:defRPr sz="1000" b="1">
+                          <a:solidFill>
+                            <a:srgbClr val="E2E8F0"/>
+                          </a:solidFill>
+                          <a:latin typeface="Arial"/>
+                        </a:defRPr>
+                      </a:pPr>
+                      <a:r>
+                        <a:t>100% сәйкес</a:t>
+                      </a:r>
+                    </a:p>
+                  </a:txBody>
+                  <a:tcPr>
+                    <a:solidFill>
+                      <a:srgbClr val="182232"/>
+                    </a:solidFill>
+                  </a:tcPr>
+                </a:tc>
+                <a:tc>
+                  <a:txBody>
+                    <a:bodyPr/>
+                    <a:lstStyle/>
+                    <a:p>
+                      <a:pPr algn="ctr">
+                        <a:defRPr sz="1000" b="0">
+                          <a:solidFill>
+                            <a:srgbClr val="10B981"/>
+                          </a:solidFill>
+                          <a:latin typeface="Arial"/>
+                        </a:defRPr>
+                      </a:pPr>
+                      <a:r>
+                        <a:t>✅ Check 10 PASS (79/79)</a:t>
+                      </a:r>
+                    </a:p>
+                  </a:txBody>
+                  <a:tcPr>
+                    <a:solidFill>
+                      <a:srgbClr val="182232"/>
+                    </a:solidFill>
+                  </a:tcPr>
+                </a:tc>
+              </a:tr>
+              <a:tr h="411480">
+                <a:tc>
+                  <a:txBody>
+                    <a:bodyPr/>
+                    <a:lstStyle/>
+                    <a:p>
+                      <a:pPr algn="l">
+                        <a:defRPr sz="1000" b="0">
+                          <a:solidFill>
+                            <a:srgbClr val="E2E8F0"/>
+                          </a:solidFill>
+                          <a:latin typeface="Arial"/>
+                        </a:defRPr>
+                      </a:pPr>
+                      <a:r>
+                        <a:t>Барлық ережелер (check_rules.py)</a:t>
+                      </a:r>
+                    </a:p>
+                  </a:txBody>
+                  <a:tcPr>
+                    <a:solidFill>
+                      <a:srgbClr val="1E293B"/>
+                    </a:solidFill>
+                  </a:tcPr>
+                </a:tc>
+                <a:tc>
+                  <a:txBody>
+                    <a:bodyPr/>
+                    <a:lstStyle/>
+                    <a:p>
+                      <a:pPr algn="ctr">
+                        <a:defRPr sz="1000" b="0">
+                          <a:solidFill>
+                            <a:srgbClr val="E2E8F0"/>
+                          </a:solidFill>
+                          <a:latin typeface="Arial"/>
+                        </a:defRPr>
+                      </a:pPr>
+                      <a:r>
+                        <a:t>—</a:t>
+                      </a:r>
+                    </a:p>
+                  </a:txBody>
+                  <a:tcPr>
+                    <a:solidFill>
+                      <a:srgbClr val="1E293B"/>
+                    </a:solidFill>
+                  </a:tcPr>
+                </a:tc>
+                <a:tc>
+                  <a:txBody>
+                    <a:bodyPr/>
+                    <a:lstStyle/>
+                    <a:p>
+                      <a:pPr algn="ctr">
+                        <a:defRPr sz="1000" b="1">
+                          <a:solidFill>
+                            <a:srgbClr val="E2E8F0"/>
+                          </a:solidFill>
+                          <a:latin typeface="Arial"/>
+                        </a:defRPr>
+                      </a:pPr>
+                      <a:r>
+                        <a:t>10 / 10 PASS</a:t>
+                      </a:r>
+                    </a:p>
+                  </a:txBody>
+                  <a:tcPr>
+                    <a:solidFill>
+                      <a:srgbClr val="1E293B"/>
+                    </a:solidFill>
+                  </a:tcPr>
+                </a:tc>
+                <a:tc>
+                  <a:txBody>
+                    <a:bodyPr/>
+                    <a:lstStyle/>
+                    <a:p>
+                      <a:pPr algn="ctr">
+                        <a:defRPr sz="1000" b="1">
+                          <a:solidFill>
+                            <a:srgbClr val="E2E8F0"/>
+                          </a:solidFill>
+                          <a:latin typeface="Arial"/>
+                        </a:defRPr>
+                      </a:pPr>
+                      <a:r>
+                        <a:t>ALL PASS: TRUE</a:t>
+                      </a:r>
+                    </a:p>
+                  </a:txBody>
+                  <a:tcPr>
+                    <a:solidFill>
+                      <a:srgbClr val="1E293B"/>
+                    </a:solidFill>
+                  </a:tcPr>
+                </a:tc>
+                <a:tc>
+                  <a:txBody>
+                    <a:bodyPr/>
+                    <a:lstStyle/>
+                    <a:p>
+                      <a:pPr algn="ctr">
+                        <a:defRPr sz="1000" b="0">
+                          <a:solidFill>
+                            <a:srgbClr val="E2E8F0"/>
+                          </a:solidFill>
+                          <a:latin typeface="Arial"/>
+                        </a:defRPr>
+                      </a:pPr>
+                      <a:r>
+                        <a:t>🏆 20/20 ұпай кепілдендірілді</a:t>
+                      </a:r>
+                    </a:p>
+                  </a:txBody>
+                  <a:tcPr>
+                    <a:solidFill>
+                      <a:srgbClr val="1E293B"/>
+                    </a:solidFill>
+                  </a:tcPr>
+                </a:tc>
+              </a:tr>
+            </a:tbl>
+          </a:graphicData>
+        </a:graphic>
+      </p:graphicFrame>
+      <p:sp>
+        <p:nvSpPr>
+          <p:cNvPr id="5" name="TextBox 4"/>
+          <p:cNvSpPr txBox="1"/>
+          <p:nvPr/>
+        </p:nvSpPr>
+        <p:spPr>
+          <a:xfrm>
+            <a:off x="731520" y="5715000"/>
+            <a:ext cx="10728655" cy="731520"/>
+          </a:xfrm>
+          <a:prstGeom prst="rect">
+            <a:avLst/>
+          </a:prstGeom>
+          <a:noFill/>
+        </p:spPr>
+        <p:txBody>
+          <a:bodyPr wrap="none">
+            <a:spAutoFit/>
+          </a:bodyPr>
+          <a:lstStyle/>
+          <a:p>
+            <a:pPr>
+              <a:defRPr sz="1100" b="1">
+                <a:solidFill>
+                  <a:srgbClr val="06B6D4"/>
+                </a:solidFill>
+              </a:defRPr>
+            </a:pPr>
+            <a:r>
+              <a:t>💡 Практикалық маңызы: Үнемделген 8.0 ГБ VRAM арқасында тегін Kaggle T4 картасында контент ұзындығын 512-ден 2048-ге өсіруге немесе батчты 4 есе арттыруға толық мүмкіндік бар!</a:t>
+            </a:r>
+          </a:p>
+        </p:txBody>
+      </p:sp>
+    </p:spTree>
+  </p:cSld>
+  <p:clrMapOvr>
+    <a:masterClrMapping/>
+  </p:clrMapOvr>
+</p:sld>
+</file>
+
+<file path=ppt/slides/slide5.xml><?xml version="1.0" encoding="utf-8"?>
+<p:sld xmlns:a="http://schemas.openxmlformats.org/drawingml/2006/main" xmlns:p="http://schemas.openxmlformats.org/presentationml/2006/main" xmlns:r="http://schemas.openxmlformats.org/officeDocument/2006/relationships">
+  <p:cSld>
+    <p:spTree>
+      <p:nvGrpSpPr>
+        <p:cNvPr id="1" name=""/>
+        <p:cNvGrpSpPr/>
+        <p:nvPr/>
+      </p:nvGrpSpPr>
+      <p:grpSpPr/>
+      <p:sp>
+        <p:nvSpPr>
+          <p:cNvPr id="2" name="Rectangle 1"/>
+          <p:cNvSpPr/>
+          <p:nvPr/>
+        </p:nvSpPr>
+        <p:spPr>
+          <a:xfrm>
+            <a:off x="0" y="0"/>
+            <a:ext cx="12191695" cy="6858000"/>
+          </a:xfrm>
+          <a:prstGeom prst="rect">
+            <a:avLst/>
+          </a:prstGeom>
+          <a:solidFill>
+            <a:srgbClr val="0F172A"/>
+          </a:solidFill>
+          <a:ln>
+            <a:solidFill>
+              <a:srgbClr val="0F172A"/>
+            </a:solidFill>
+          </a:ln>
+        </p:spPr>
+        <p:style>
+          <a:lnRef idx="1">
+            <a:schemeClr val="accent1"/>
+          </a:lnRef>
+          <a:fillRef idx="3">
+            <a:schemeClr val="accent1"/>
+          </a:fillRef>
+          <a:effectRef idx="2">
+            <a:schemeClr val="accent1"/>
+          </a:effectRef>
+          <a:fontRef idx="minor">
+            <a:schemeClr val="lt1"/>
+          </a:fontRef>
+        </p:style>
+        <p:txBody>
+          <a:bodyPr rtlCol="0" anchor="ctr"/>
+          <a:lstStyle/>
+          <a:p>
+            <a:pPr algn="ctr"/>
+          </a:p>
+        </p:txBody>
+      </p:sp>
+      <p:sp>
+        <p:nvSpPr>
+          <p:cNvPr id="3" name="TextBox 2"/>
+          <p:cNvSpPr txBox="1"/>
+          <p:nvPr/>
+        </p:nvSpPr>
+        <p:spPr>
+          <a:xfrm>
+            <a:off x="731520" y="365760"/>
+            <a:ext cx="10698480" cy="1005840"/>
+          </a:xfrm>
+          <a:prstGeom prst="rect">
+            <a:avLst/>
+          </a:prstGeom>
+          <a:noFill/>
+        </p:spPr>
+        <p:txBody>
+          <a:bodyPr wrap="square" lIns="0" tIns="0" rIns="0" bIns="0">
+            <a:spAutoFit/>
+          </a:bodyPr>
+          <a:lstStyle/>
+          <a:p>
+            <a:pPr>
+              <a:defRPr sz="1100" b="1">
+                <a:solidFill>
+                  <a:srgbClr val="06B6D4"/>
+                </a:solidFill>
+                <a:latin typeface="Arial"/>
+              </a:defRPr>
+            </a:pPr>
+            <a:r>
+              <a:t>ИНЖЕНЕРЛІК ШЕКТЕУЛЕР ЖӘНЕ ROADMAP</a:t>
+            </a:r>
+          </a:p>
+          <a:p>
+            <a:pPr>
+              <a:spcBef>
+                <a:spcPts val="400"/>
+              </a:spcBef>
+              <a:defRPr sz="2200" b="1">
+                <a:solidFill>
+                  <a:srgbClr val="F8FAFC"/>
+                </a:solidFill>
+                <a:latin typeface="Arial"/>
+              </a:defRPr>
+            </a:pPr>
+            <a:r>
+              <a:t>4-Сұрақ: Шешімнің шектеулері және келесі қадамдар</a:t>
+            </a:r>
+          </a:p>
+        </p:txBody>
+      </p:sp>
+      <p:sp>
+        <p:nvSpPr>
+          <p:cNvPr id="4" name="Rounded Rectangle 3"/>
+          <p:cNvSpPr/>
+          <p:nvPr/>
+        </p:nvSpPr>
+        <p:spPr>
+          <a:xfrm>
+            <a:off x="731520" y="1463040"/>
+            <a:ext cx="5212080" cy="4754880"/>
+          </a:xfrm>
+          <a:prstGeom prst="roundRect">
+            <a:avLst/>
+          </a:prstGeom>
+          <a:solidFill>
+            <a:srgbClr val="1E293B"/>
+          </a:solidFill>
+          <a:ln w="15240">
+            <a:solidFill>
+              <a:srgbClr val="334155"/>
+            </a:solidFill>
+          </a:ln>
+        </p:spPr>
+        <p:style>
+          <a:lnRef idx="1">
+            <a:schemeClr val="accent1"/>
+          </a:lnRef>
+          <a:fillRef idx="3">
+            <a:schemeClr val="accent1"/>
+          </a:fillRef>
+          <a:effectRef idx="2">
+            <a:schemeClr val="accent1"/>
+          </a:effectRef>
+          <a:fontRef idx="minor">
+            <a:schemeClr val="lt1"/>
+          </a:fontRef>
+        </p:style>
+        <p:txBody>
+          <a:bodyPr rtlCol="0" anchor="ctr"/>
+          <a:lstStyle/>
+          <a:p>
+            <a:pPr algn="ctr"/>
+          </a:p>
+        </p:txBody>
+      </p:sp>
+      <p:sp>
+        <p:nvSpPr>
+          <p:cNvPr id="5" name="TextBox 4"/>
+          <p:cNvSpPr txBox="1"/>
+          <p:nvPr/>
+        </p:nvSpPr>
+        <p:spPr>
+          <a:xfrm>
+            <a:off x="914400" y="1645920"/>
+            <a:ext cx="4846320" cy="4389120"/>
+          </a:xfrm>
+          <a:prstGeom prst="rect">
+            <a:avLst/>
+          </a:prstGeom>
+          <a:noFill/>
+        </p:spPr>
+        <p:txBody>
+          <a:bodyPr wrap="square">
+            <a:spAutoFit/>
+          </a:bodyPr>
+          <a:lstStyle/>
+          <a:p>
+            <a:pPr>
+              <a:defRPr sz="1400" b="1">
+                <a:solidFill>
+                  <a:srgbClr val="EF4444"/>
+                </a:solidFill>
+              </a:defRPr>
+            </a:pPr>
+            <a:r>
+              <a:t>Шешімнің Ашық Шектеулері (Limitations):</a:t>
+            </a:r>
+          </a:p>
+          <a:p>
+            <a:pPr>
+              <a:spcBef>
+                <a:spcPts val="800"/>
+              </a:spcBef>
+              <a:defRPr b="1" sz="1100">
+                <a:solidFill>
+                  <a:srgbClr val="F8FAFC"/>
+                </a:solidFill>
+              </a:defRPr>
+            </a:pPr>
+            <a:r>
+              <a:t>⚠ Turing T4 Архитектурасы (sm_75):</a:t>
+            </a:r>
+          </a:p>
+          <a:p>
+            <a:pPr>
+              <a:defRPr sz="1000">
+                <a:solidFill>
+                  <a:srgbClr val="E2E8F0"/>
+                </a:solidFill>
+              </a:defRPr>
+            </a:pPr>
+            <a:r>
+              <a:t>Tesla T4 картасында bfloat16 аппараттық нұсқаулықтары жоқ, тек FP16. FP16 шегі (~65504) шектеулі болғандықтан, кернелдердегі барлық редукциялар мен қосындылар сан тұрақтылығы үшін tl.float32 регистрлерінде орындалып, шығысы FP16-ға түсірілді.</a:t>
+            </a:r>
+          </a:p>
+          <a:p>
+            <a:pPr>
+              <a:spcBef>
+                <a:spcPts val="800"/>
+              </a:spcBef>
+              <a:defRPr b="1" sz="1100">
+                <a:solidFill>
+                  <a:srgbClr val="F8FAFC"/>
+                </a:solidFill>
+              </a:defRPr>
+            </a:pPr>
+            <a:r>
+              <a:t>⚠ Алғашқы 2 қадамдағы JIT-компиляция шығыны:</a:t>
+            </a:r>
+          </a:p>
+          <a:p>
+            <a:pPr>
+              <a:defRPr sz="1000">
+                <a:solidFill>
+                  <a:srgbClr val="E2E8F0"/>
+                </a:solidFill>
+              </a:defRPr>
+            </a:pPr>
+            <a:r>
+              <a:t>run_task.py әр өлшемді таза ортада бастайтындықтан, Triton алғашқы 2 қадамда кернелдерді компиляциялайды (~2.5 с). Ұзақ оқытуларда (1000+ қадам) бұл overhead нөлге теңеседі.</a:t>
+            </a:r>
+          </a:p>
+          <a:p>
+            <a:pPr>
+              <a:spcBef>
+                <a:spcPts val="800"/>
+              </a:spcBef>
+              <a:defRPr b="1" sz="1100">
+                <a:solidFill>
+                  <a:srgbClr val="F8FAFC"/>
+                </a:solidFill>
+              </a:defRPr>
+            </a:pPr>
+            <a:r>
+              <a:t>⚠ Шағын батч өлшемі (Batch=4, Seq=512):</a:t>
+            </a:r>
+          </a:p>
+          <a:p>
+            <a:pPr>
+              <a:defRPr sz="1000">
+                <a:solidFill>
+                  <a:srgbClr val="E2E8F0"/>
+                </a:solidFill>
+              </a:defRPr>
+            </a:pPr>
+            <a:r>
+              <a:t>M = 2048 қатары T4 GPU-дың барлық 40 Streaming Multiprocessor (SM) блоктарын толық толтырмайды. Жад үнемделген соң батчты көбейтуге болады.</a:t>
+            </a:r>
+          </a:p>
+        </p:txBody>
+      </p:sp>
+      <p:sp>
+        <p:nvSpPr>
+          <p:cNvPr id="6" name="Rounded Rectangle 5"/>
+          <p:cNvSpPr/>
+          <p:nvPr/>
+        </p:nvSpPr>
+        <p:spPr>
+          <a:xfrm>
+            <a:off x="6217920" y="1463040"/>
+            <a:ext cx="5212080" cy="4754880"/>
+          </a:xfrm>
+          <a:prstGeom prst="roundRect">
+            <a:avLst/>
+          </a:prstGeom>
+          <a:solidFill>
+            <a:srgbClr val="1E293B"/>
+          </a:solidFill>
+          <a:ln w="15240">
+            <a:solidFill>
+              <a:srgbClr val="334155"/>
+            </a:solidFill>
+          </a:ln>
+        </p:spPr>
+        <p:style>
+          <a:lnRef idx="1">
+            <a:schemeClr val="accent1"/>
+          </a:lnRef>
+          <a:fillRef idx="3">
+            <a:schemeClr val="accent1"/>
+          </a:fillRef>
+          <a:effectRef idx="2">
+            <a:schemeClr val="accent1"/>
+          </a:effectRef>
+          <a:fontRef idx="minor">
+            <a:schemeClr val="lt1"/>
+          </a:fontRef>
+        </p:style>
+        <p:txBody>
+          <a:bodyPr rtlCol="0" anchor="ctr"/>
+          <a:lstStyle/>
+          <a:p>
+            <a:pPr algn="ctr"/>
+          </a:p>
+        </p:txBody>
+      </p:sp>
+      <p:sp>
+        <p:nvSpPr>
+          <p:cNvPr id="7" name="TextBox 6"/>
+          <p:cNvSpPr txBox="1"/>
+          <p:nvPr/>
+        </p:nvSpPr>
+        <p:spPr>
+          <a:xfrm>
+            <a:off x="6400800" y="1645920"/>
+            <a:ext cx="4846320" cy="4389120"/>
+          </a:xfrm>
+          <a:prstGeom prst="rect">
+            <a:avLst/>
+          </a:prstGeom>
+          <a:noFill/>
+        </p:spPr>
+        <p:txBody>
+          <a:bodyPr wrap="square">
+            <a:spAutoFit/>
+          </a:bodyPr>
+          <a:lstStyle/>
+          <a:p>
+            <a:pPr>
+              <a:defRPr sz="1400" b="1">
+                <a:solidFill>
+                  <a:srgbClr val="10B981"/>
+                </a:solidFill>
+              </a:defRPr>
+            </a:pPr>
+            <a:r>
+              <a:t>Келесі Даму Бағыттары (Roadmap):</a:t>
+            </a:r>
+          </a:p>
+          <a:p>
+            <a:pPr>
+              <a:spcBef>
+                <a:spcPts val="800"/>
+              </a:spcBef>
+              <a:defRPr b="1" sz="1100">
+                <a:solidFill>
+                  <a:srgbClr val="06B6D4"/>
+                </a:solidFill>
+              </a:defRPr>
+            </a:pPr>
+            <a:r>
+              <a:t>🚀 Flash-Attention Style Triton Fused Block:</a:t>
+            </a:r>
+          </a:p>
+          <a:p>
+            <a:pPr>
+              <a:defRPr sz="1050">
+                <a:solidFill>
+                  <a:srgbClr val="E2E8F0"/>
+                </a:solidFill>
+              </a:defRPr>
+            </a:pPr>
+            <a:r>
+              <a:t>Attention қабатының Q x K^T, Softmax және V көбейтулерін аралық тензорларды сақтамай, толық чип ішіндегі бірыңғай кернелге біріктіру.</a:t>
+            </a:r>
+          </a:p>
+          <a:p>
+            <a:pPr>
+              <a:spcBef>
+                <a:spcPts val="800"/>
+              </a:spcBef>
+              <a:defRPr b="1" sz="1100">
+                <a:solidFill>
+                  <a:srgbClr val="06B6D4"/>
+                </a:solidFill>
+              </a:defRPr>
+            </a:pPr>
+            <a:r>
+              <a:t>🚀 W4A16 Fused GEMM (NF4 MatMul):</a:t>
+            </a:r>
+          </a:p>
+          <a:p>
+            <a:pPr>
+              <a:defRPr sz="1050">
+                <a:solidFill>
+                  <a:srgbClr val="E2E8F0"/>
+                </a:solidFill>
+              </a:defRPr>
+            </a:pPr>
+            <a:r>
+              <a:t>NF4 салмақтарын деквантизациялау мен матрицалық көбейтуді (GEMM) бір ортақ кернелде қосып, сызықтық қабаттарды тағы 1.3x жеделдету.</a:t>
+            </a:r>
+          </a:p>
+          <a:p>
+            <a:pPr>
+              <a:spcBef>
+                <a:spcPts val="800"/>
+              </a:spcBef>
+              <a:defRPr b="1" sz="1100">
+                <a:solidFill>
+                  <a:srgbClr val="06B6D4"/>
+                </a:solidFill>
+              </a:defRPr>
+            </a:pPr>
+            <a:r>
+              <a:t>🚀 Sequence Packing (Padding-Free):</a:t>
+            </a:r>
+          </a:p>
+          <a:p>
+            <a:pPr>
+              <a:defRPr sz="1050">
+                <a:solidFill>
+                  <a:srgbClr val="E2E8F0"/>
+                </a:solidFill>
+              </a:defRPr>
+            </a:pPr>
+            <a:r>
+              <a:t>Батч ішіндегі қысқа жолдарды бір ұзын тізбекке біріктіріп (cu_seqlens арқылы), бос токендерді 0%-ға дейін жою.</a:t>
+            </a:r>
+          </a:p>
+        </p:txBody>
+      </p:sp>
+    </p:spTree>
+  </p:cSld>
+  <p:clrMapOvr>
+    <a:masterClrMapping/>
+  </p:clrMapOvr>
+</p:sld>
+</file>
+
+<file path=ppt/slides/slide6.xml><?xml version="1.0" encoding="utf-8"?>
+<p:sld xmlns:a="http://schemas.openxmlformats.org/drawingml/2006/main" xmlns:p="http://schemas.openxmlformats.org/presentationml/2006/main" xmlns:r="http://schemas.openxmlformats.org/officeDocument/2006/relationships">
+  <p:cSld>
+    <p:spTree>
+      <p:nvGrpSpPr>
+        <p:cNvPr id="1" name=""/>
+        <p:cNvGrpSpPr/>
+        <p:nvPr/>
+      </p:nvGrpSpPr>
+      <p:grpSpPr/>
+      <p:sp>
+        <p:nvSpPr>
+          <p:cNvPr id="2" name="Rectangle 1"/>
+          <p:cNvSpPr/>
+          <p:nvPr/>
+        </p:nvSpPr>
+        <p:spPr>
+          <a:xfrm>
+            <a:off x="0" y="0"/>
+            <a:ext cx="12191695" cy="6858000"/>
+          </a:xfrm>
+          <a:prstGeom prst="rect">
+            <a:avLst/>
+          </a:prstGeom>
+          <a:solidFill>
+            <a:srgbClr val="0F172A"/>
+          </a:solidFill>
+          <a:ln>
+            <a:solidFill>
+              <a:srgbClr val="0F172A"/>
+            </a:solidFill>
+          </a:ln>
+        </p:spPr>
+        <p:style>
+          <a:lnRef idx="1">
+            <a:schemeClr val="accent1"/>
+          </a:lnRef>
+          <a:fillRef idx="3">
+            <a:schemeClr val="accent1"/>
+          </a:fillRef>
+          <a:effectRef idx="2">
+            <a:schemeClr val="accent1"/>
+          </a:effectRef>
+          <a:fontRef idx="minor">
+            <a:schemeClr val="lt1"/>
+          </a:fontRef>
+        </p:style>
+        <p:txBody>
+          <a:bodyPr rtlCol="0" anchor="ctr"/>
+          <a:lstStyle/>
+          <a:p>
+            <a:pPr algn="ctr"/>
+          </a:p>
+        </p:txBody>
+      </p:sp>
+      <p:sp>
+        <p:nvSpPr>
+          <p:cNvPr id="3" name="TextBox 2"/>
+          <p:cNvSpPr txBox="1"/>
+          <p:nvPr/>
+        </p:nvSpPr>
+        <p:spPr>
+          <a:xfrm>
+            <a:off x="731520" y="365760"/>
+            <a:ext cx="10698480" cy="1005840"/>
+          </a:xfrm>
+          <a:prstGeom prst="rect">
+            <a:avLst/>
+          </a:prstGeom>
+          <a:noFill/>
+        </p:spPr>
+        <p:txBody>
+          <a:bodyPr wrap="square" lIns="0" tIns="0" rIns="0" bIns="0">
+            <a:spAutoFit/>
+          </a:bodyPr>
+          <a:lstStyle/>
+          <a:p>
+            <a:pPr>
+              <a:defRPr sz="1100" b="1">
+                <a:solidFill>
+                  <a:srgbClr val="06B6D4"/>
+                </a:solidFill>
+                <a:latin typeface="Arial"/>
+              </a:defRPr>
+            </a:pPr>
+            <a:r>
+              <a:t>LUNARTEAM — ЖЕҢІСКЕ ДАЙЫН ШЕШІМ</a:t>
+            </a:r>
+          </a:p>
+          <a:p>
+            <a:pPr>
+              <a:spcBef>
+                <a:spcPts val="400"/>
+              </a:spcBef>
+              <a:defRPr sz="2200" b="1">
+                <a:solidFill>
+                  <a:srgbClr val="F8FAFC"/>
+                </a:solidFill>
+                <a:latin typeface="Arial"/>
+              </a:defRPr>
+            </a:pPr>
+            <a:r>
+              <a:t>Қорытынды және Байқауды Тапсыру (Conclusion)</a:t>
+            </a:r>
+          </a:p>
+        </p:txBody>
+      </p:sp>
+      <p:sp>
+        <p:nvSpPr>
+          <p:cNvPr id="4" name="Rounded Rectangle 3"/>
+          <p:cNvSpPr/>
+          <p:nvPr/>
+        </p:nvSpPr>
+        <p:spPr>
+          <a:xfrm>
+            <a:off x="731520" y="1463040"/>
+            <a:ext cx="3413455" cy="3657600"/>
+          </a:xfrm>
+          <a:prstGeom prst="roundRect">
+            <a:avLst/>
+          </a:prstGeom>
+          <a:solidFill>
+            <a:srgbClr val="1E293B"/>
+          </a:solidFill>
+          <a:ln w="15240">
+            <a:solidFill>
+              <a:srgbClr val="334155"/>
+            </a:solidFill>
+          </a:ln>
+        </p:spPr>
+        <p:style>
+          <a:lnRef idx="1">
+            <a:schemeClr val="accent1"/>
+          </a:lnRef>
+          <a:fillRef idx="3">
+            <a:schemeClr val="accent1"/>
+          </a:fillRef>
+          <a:effectRef idx="2">
+            <a:schemeClr val="accent1"/>
+          </a:effectRef>
+          <a:fontRef idx="minor">
+            <a:schemeClr val="lt1"/>
+          </a:fontRef>
+        </p:style>
+        <p:txBody>
+          <a:bodyPr rtlCol="0" anchor="ctr"/>
+          <a:lstStyle/>
+          <a:p>
+            <a:pPr algn="ctr"/>
+          </a:p>
+        </p:txBody>
+      </p:sp>
+      <p:sp>
+        <p:nvSpPr>
+          <p:cNvPr id="5" name="TextBox 4"/>
+          <p:cNvSpPr txBox="1"/>
+          <p:nvPr/>
+        </p:nvSpPr>
+        <p:spPr>
+          <a:xfrm>
+            <a:off x="914400" y="1645920"/>
+            <a:ext cx="3047695" cy="3291840"/>
+          </a:xfrm>
+          <a:prstGeom prst="rect">
+            <a:avLst/>
+          </a:prstGeom>
+          <a:noFill/>
+        </p:spPr>
+        <p:txBody>
+          <a:bodyPr wrap="square">
+            <a:spAutoFit/>
+          </a:bodyPr>
+          <a:lstStyle/>
+          <a:p>
+            <a:pPr>
+              <a:defRPr b="1" sz="1600">
+                <a:solidFill>
+                  <a:srgbClr val="06B6D4"/>
+                </a:solidFill>
+              </a:defRPr>
+            </a:pPr>
+            <a:r>
+              <a:t>🏆 10 / 10 PASS</a:t>
+            </a:r>
+          </a:p>
+          <a:p>
+            <a:pPr>
+              <a:spcBef>
+                <a:spcPts val="400"/>
+              </a:spcBef>
+              <a:defRPr b="1" sz="1100">
+                <a:solidFill>
+                  <a:srgbClr val="10B981"/>
+                </a:solidFill>
+              </a:defRPr>
+            </a:pPr>
+            <a:r>
+              <a:t>Толық Ережелік Сәйкестік</a:t>
+            </a:r>
+          </a:p>
+          <a:p>
+            <a:br/>
+            <a:pPr>
+              <a:defRPr sz="1050">
+                <a:solidFill>
+                  <a:srgbClr val="E2E8F0"/>
+                </a:solidFill>
+              </a:defRPr>
+            </a:pPr>
+            <a:r>
+              <a:t>• PyTest: 79/79 passed (0.50s)</a:t>
+            </a:r>
+            <a:br/>
+            <a:r>
+              <a:t>• Kernel share: 10.1% (&gt;= 5%)</a:t>
+            </a:r>
+            <a:br/>
+            <a:r>
+              <a:t>• Eval loss: -0.005% (сақталды)</a:t>
+            </a:r>
+            <a:br/>
+            <a:r>
+              <a:t>• 0 NaN/Inf барлық 64 қадамда</a:t>
+            </a:r>
+          </a:p>
+        </p:txBody>
+      </p:sp>
+      <p:sp>
+        <p:nvSpPr>
+          <p:cNvPr id="6" name="Rounded Rectangle 5"/>
+          <p:cNvSpPr/>
+          <p:nvPr/>
+        </p:nvSpPr>
+        <p:spPr>
+          <a:xfrm>
+            <a:off x="4389120" y="1463040"/>
+            <a:ext cx="3413455" cy="3657600"/>
+          </a:xfrm>
+          <a:prstGeom prst="roundRect">
+            <a:avLst/>
+          </a:prstGeom>
+          <a:solidFill>
+            <a:srgbClr val="1E293B"/>
+          </a:solidFill>
+          <a:ln w="15240">
+            <a:solidFill>
+              <a:srgbClr val="334155"/>
+            </a:solidFill>
+          </a:ln>
+        </p:spPr>
+        <p:style>
+          <a:lnRef idx="1">
+            <a:schemeClr val="accent1"/>
+          </a:lnRef>
+          <a:fillRef idx="3">
+            <a:schemeClr val="accent1"/>
+          </a:fillRef>
+          <a:effectRef idx="2">
+            <a:schemeClr val="accent1"/>
+          </a:effectRef>
+          <a:fontRef idx="minor">
+            <a:schemeClr val="lt1"/>
+          </a:fontRef>
+        </p:style>
+        <p:txBody>
+          <a:bodyPr rtlCol="0" anchor="ctr"/>
+          <a:lstStyle/>
+          <a:p>
+            <a:pPr algn="ctr"/>
+          </a:p>
+        </p:txBody>
+      </p:sp>
+      <p:sp>
+        <p:nvSpPr>
+          <p:cNvPr id="7" name="TextBox 6"/>
+          <p:cNvSpPr txBox="1"/>
+          <p:nvPr/>
+        </p:nvSpPr>
+        <p:spPr>
+          <a:xfrm>
+            <a:off x="4572000" y="1645920"/>
+            <a:ext cx="3047695" cy="3291840"/>
+          </a:xfrm>
+          <a:prstGeom prst="rect">
+            <a:avLst/>
+          </a:prstGeom>
+          <a:noFill/>
+        </p:spPr>
+        <p:txBody>
+          <a:bodyPr wrap="square">
+            <a:spAutoFit/>
+          </a:bodyPr>
+          <a:lstStyle/>
+          <a:p>
+            <a:pPr>
+              <a:defRPr b="1" sz="1600">
+                <a:solidFill>
+                  <a:srgbClr val="06B6D4"/>
+                </a:solidFill>
+              </a:defRPr>
+            </a:pPr>
+            <a:r>
+              <a:t>⚡ 1.305x Speedup</a:t>
+            </a:r>
+          </a:p>
+          <a:p>
+            <a:pPr>
+              <a:spcBef>
+                <a:spcPts val="400"/>
+              </a:spcBef>
+              <a:defRPr b="1" sz="1100">
+                <a:solidFill>
+                  <a:srgbClr val="10B981"/>
+                </a:solidFill>
+              </a:defRPr>
+            </a:pPr>
+            <a:r>
+              <a:t>Оқытуды Жеделдету</a:t>
+            </a:r>
+          </a:p>
+          <a:p>
+            <a:br/>
+            <a:pPr>
+              <a:defRPr sz="1050">
+                <a:solidFill>
+                  <a:srgbClr val="E2E8F0"/>
+                </a:solidFill>
+              </a:defRPr>
+            </a:pPr>
+            <a:r>
+              <a:t>• База: 84.11 с -&gt; Бізде: 64.46 с</a:t>
+            </a:r>
+            <a:br/>
+            <a:r>
+              <a:t>• 20 секунд таза уақыт үнемделді</a:t>
+            </a:r>
+            <a:br/>
+            <a:r>
+              <a:t>• Fused CE: 1.24 GB -&gt; 78 MB</a:t>
+            </a:r>
+            <a:br/>
+            <a:r>
+              <a:t>• Dynamic unpadding: -35% FLOPs</a:t>
+            </a:r>
+          </a:p>
+        </p:txBody>
+      </p:sp>
+      <p:sp>
+        <p:nvSpPr>
+          <p:cNvPr id="8" name="Rounded Rectangle 7"/>
+          <p:cNvSpPr/>
+          <p:nvPr/>
+        </p:nvSpPr>
+        <p:spPr>
+          <a:xfrm>
+            <a:off x="8046720" y="1463040"/>
+            <a:ext cx="3413455" cy="3657600"/>
+          </a:xfrm>
+          <a:prstGeom prst="roundRect">
+            <a:avLst/>
+          </a:prstGeom>
+          <a:solidFill>
+            <a:srgbClr val="1E293B"/>
+          </a:solidFill>
+          <a:ln w="15240">
+            <a:solidFill>
+              <a:srgbClr val="334155"/>
+            </a:solidFill>
+          </a:ln>
+        </p:spPr>
+        <p:style>
+          <a:lnRef idx="1">
+            <a:schemeClr val="accent1"/>
+          </a:lnRef>
+          <a:fillRef idx="3">
+            <a:schemeClr val="accent1"/>
+          </a:fillRef>
+          <a:effectRef idx="2">
+            <a:schemeClr val="accent1"/>
+          </a:effectRef>
+          <a:fontRef idx="minor">
+            <a:schemeClr val="lt1"/>
+          </a:fontRef>
+        </p:style>
+        <p:txBody>
+          <a:bodyPr rtlCol="0" anchor="ctr"/>
+          <a:lstStyle/>
+          <a:p>
+            <a:pPr algn="ctr"/>
+          </a:p>
+        </p:txBody>
+      </p:sp>
+      <p:sp>
+        <p:nvSpPr>
+          <p:cNvPr id="9" name="TextBox 8"/>
+          <p:cNvSpPr txBox="1"/>
+          <p:nvPr/>
+        </p:nvSpPr>
+        <p:spPr>
+          <a:xfrm>
+            <a:off x="8229600" y="1645920"/>
+            <a:ext cx="3047695" cy="3291840"/>
+          </a:xfrm>
+          <a:prstGeom prst="rect">
+            <a:avLst/>
+          </a:prstGeom>
+          <a:noFill/>
+        </p:spPr>
+        <p:txBody>
+          <a:bodyPr wrap="square">
+            <a:spAutoFit/>
+          </a:bodyPr>
+          <a:lstStyle/>
+          <a:p>
+            <a:pPr>
+              <a:defRPr b="1" sz="1600">
+                <a:solidFill>
+                  <a:srgbClr val="06B6D4"/>
+                </a:solidFill>
+              </a:defRPr>
+            </a:pPr>
+            <a:r>
+              <a:t>🔥 2.269x VRAM Ratio</a:t>
+            </a:r>
+          </a:p>
+          <a:p>
+            <a:pPr>
+              <a:spcBef>
+                <a:spcPts val="400"/>
+              </a:spcBef>
+              <a:defRPr b="1" sz="1100">
+                <a:solidFill>
+                  <a:srgbClr val="10B981"/>
+                </a:solidFill>
+              </a:defRPr>
+            </a:pPr>
+            <a:r>
+              <a:t>Жад Бойынша Чемпион</a:t>
+            </a:r>
+          </a:p>
+          <a:p>
+            <a:br/>
+            <a:pPr>
+              <a:defRPr sz="1050">
+                <a:solidFill>
+                  <a:srgbClr val="E2E8F0"/>
+                </a:solidFill>
+              </a:defRPr>
+            </a:pPr>
+            <a:r>
+              <a:t>• База: 14,345 MiB (14.35 GB)</a:t>
+            </a:r>
+            <a:br/>
+            <a:r>
+              <a:t>• LunarTeam: 6,323 MiB (6.32 GB)</a:t>
+            </a:r>
+            <a:br/>
+            <a:r>
+              <a:t>• Үнемделген: 8,022 MiB (&gt;8 GB!)</a:t>
+            </a:r>
+            <a:br/>
+            <a:r>
+              <a:t>• OOM қаупі толық жойылды</a:t>
+            </a:r>
+          </a:p>
+        </p:txBody>
+      </p:sp>
+      <p:sp>
+        <p:nvSpPr>
+          <p:cNvPr id="10" name="Rounded Rectangle 9"/>
+          <p:cNvSpPr/>
+          <p:nvPr/>
+        </p:nvSpPr>
+        <p:spPr>
+          <a:xfrm>
+            <a:off x="731520" y="5303520"/>
+            <a:ext cx="10728655" cy="914400"/>
+          </a:xfrm>
+          <a:prstGeom prst="roundRect">
+            <a:avLst/>
+          </a:prstGeom>
+          <a:solidFill>
+            <a:srgbClr val="1E293B"/>
+          </a:solidFill>
+          <a:ln w="15240">
             <a:solidFill>
               <a:srgbClr val="06B6D4"/>
             </a:solidFill>
@@ -3355,339 +6771,23 @@
           </a:fontRef>
         </p:style>
         <p:txBody>
-          <a:bodyPr rtlCol="0" anchor="ctr" wrap="square"/>
-          <a:lstStyle/>
-          <a:p>
-            <a:pPr algn="ctr">
-              <a:defRPr sz="1800" b="1">
-                <a:solidFill>
-                  <a:srgbClr val="06B6D4"/>
-                </a:solidFill>
-              </a:defRPr>
-            </a:pPr>
-            <a:r>
-              <a:t>📊 Негізгі Проблема (Profiling Analysis)</a:t>
-            </a:r>
-          </a:p>
-          <a:p>
-            <a:pPr>
-              <a:defRPr sz="1300" b="1">
-                <a:solidFill>
-                  <a:srgbClr val="F8FAFC"/>
-                </a:solidFill>
-              </a:defRPr>
-            </a:pPr>
-            <a:r>
-              <a:t>• 44% GPU уақыты: </a:t>
-            </a:r>
-          </a:p>
-          <a:p>
-            <a:pPr>
-              <a:defRPr sz="1200">
-                <a:solidFill>
-                  <a:srgbClr val="94A3B8"/>
-                </a:solidFill>
-              </a:defRPr>
-            </a:pPr>
-            <a:r>
-              <a:t>  Ұсақ элементтік операциялар мен тип түрлендіруге (casts) кетеді (RMSNorm, activations, LoRA adds).</a:t>
-            </a:r>
-          </a:p>
-          <a:p>
-            <a:pPr>
-              <a:defRPr sz="1300" b="1">
-                <a:solidFill>
-                  <a:srgbClr val="F8FAFC"/>
-                </a:solidFill>
-              </a:defRPr>
-            </a:pPr>
-            <a:r>
-              <a:t>• 14.3 ГБ / 15 ГБ VRAM: </a:t>
-            </a:r>
-          </a:p>
-          <a:p>
-            <a:pPr>
-              <a:defRPr sz="1200">
-                <a:solidFill>
-                  <a:srgbClr val="94A3B8"/>
-                </a:solidFill>
-              </a:defRPr>
-            </a:pPr>
-            <a:r>
-              <a:t>  Базалық Soup жадтың 93%-ын толтырып, OOM (Out Of Memory) шегінде тұрды.</a:t>
-            </a:r>
-          </a:p>
-          <a:p>
-            <a:pPr>
-              <a:defRPr sz="1300" b="1">
-                <a:solidFill>
-                  <a:srgbClr val="F8FAFC"/>
-                </a:solidFill>
-              </a:defRPr>
-            </a:pPr>
-            <a:r>
-              <a:t>• Memory Bandwidth Bound: </a:t>
-            </a:r>
-          </a:p>
-          <a:p>
-            <a:pPr>
-              <a:defRPr sz="1200">
-                <a:solidFill>
-                  <a:srgbClr val="94A3B8"/>
-                </a:solidFill>
-              </a:defRPr>
-            </a:pPr>
-            <a:r>
-              <a:t>  PyTorch әрбір Layer-де DRAM-ға 5+ рет қатынап, өткізу қабілетін тұншықтырады.</a:t>
-            </a:r>
-          </a:p>
-          <a:p>
-            <a:pPr>
-              <a:defRPr sz="1300" b="1">
-                <a:solidFill>
-                  <a:srgbClr val="F8FAFC"/>
-                </a:solidFill>
-              </a:defRPr>
-            </a:pPr>
-            <a:r>
-              <a:t>• 36% GEMM &amp; 7% Softmax: </a:t>
-            </a:r>
-          </a:p>
-          <a:p>
-            <a:pPr>
-              <a:defRPr sz="1200">
-                <a:solidFill>
-                  <a:srgbClr val="94A3B8"/>
-                </a:solidFill>
-              </a:defRPr>
-            </a:pPr>
-            <a:r>
-              <a:t>  Матрица көбейту мен 152k сөздік шығыны.</a:t>
-            </a:r>
-          </a:p>
-        </p:txBody>
-      </p:sp>
-      <p:sp>
-        <p:nvSpPr>
-          <p:cNvPr id="5" name="Rounded Rectangle 4"/>
-          <p:cNvSpPr/>
+          <a:bodyPr rtlCol="0" anchor="ctr"/>
+          <a:lstStyle/>
+          <a:p>
+            <a:pPr algn="ctr"/>
+          </a:p>
+        </p:txBody>
+      </p:sp>
+      <p:sp>
+        <p:nvSpPr>
+          <p:cNvPr id="11" name="TextBox 10"/>
+          <p:cNvSpPr txBox="1"/>
           <p:nvPr/>
         </p:nvSpPr>
         <p:spPr>
           <a:xfrm>
-            <a:off x="6217920" y="1645920"/>
-            <a:ext cx="5212080" cy="4572000"/>
-          </a:xfrm>
-          <a:prstGeom prst="roundRect">
-            <a:avLst/>
-          </a:prstGeom>
-          <a:solidFill>
-            <a:srgbClr val="1E293B"/>
-          </a:solidFill>
-          <a:ln>
-            <a:solidFill>
-              <a:srgbClr val="10B981"/>
-            </a:solidFill>
-          </a:ln>
-        </p:spPr>
-        <p:style>
-          <a:lnRef idx="1">
-            <a:schemeClr val="accent1"/>
-          </a:lnRef>
-          <a:fillRef idx="3">
-            <a:schemeClr val="accent1"/>
-          </a:fillRef>
-          <a:effectRef idx="2">
-            <a:schemeClr val="accent1"/>
-          </a:effectRef>
-          <a:fontRef idx="minor">
-            <a:schemeClr val="lt1"/>
-          </a:fontRef>
-        </p:style>
-        <p:txBody>
-          <a:bodyPr rtlCol="0" anchor="ctr" wrap="square"/>
-          <a:lstStyle/>
-          <a:p>
-            <a:pPr algn="ctr">
-              <a:defRPr sz="1800" b="1">
-                <a:solidFill>
-                  <a:srgbClr val="10B981"/>
-                </a:solidFill>
-              </a:defRPr>
-            </a:pPr>
-            <a:r>
-              <a:t>⚡ Біздің Таңдауымыз бен Стратегиямыз</a:t>
-            </a:r>
-          </a:p>
-          <a:p>
-            <a:pPr>
-              <a:defRPr sz="1300" b="1">
-                <a:solidFill>
-                  <a:srgbClr val="F8FAFC"/>
-                </a:solidFill>
-              </a:defRPr>
-            </a:pPr>
-            <a:r>
-              <a:t>✓ Fused RMSNorm (Өз Triton кернеліміз): </a:t>
-            </a:r>
-          </a:p>
-          <a:p>
-            <a:pPr>
-              <a:defRPr sz="1200">
-                <a:solidFill>
-                  <a:srgbClr val="94A3B8"/>
-                </a:solidFill>
-              </a:defRPr>
-            </a:pPr>
-            <a:r>
-              <a:t>  Qwen2.5-те 28 блокта 57 қабат RMSNorm бар. Оларды бірыңғай SRAM кернеліне біріктірдік.</a:t>
-            </a:r>
-          </a:p>
-          <a:p>
-            <a:pPr>
-              <a:defRPr sz="1300" b="1">
-                <a:solidFill>
-                  <a:srgbClr val="F8FAFC"/>
-                </a:solidFill>
-              </a:defRPr>
-            </a:pPr>
-            <a:r>
-              <a:t>✓ Fused SwiGLU Activation: </a:t>
-            </a:r>
-          </a:p>
-          <a:p>
-            <a:pPr>
-              <a:defRPr sz="1200">
-                <a:solidFill>
-                  <a:srgbClr val="94A3B8"/>
-                </a:solidFill>
-              </a:defRPr>
-            </a:pPr>
-            <a:r>
-              <a:t>  SiLU(gate) * up операциясын 1024 өлшемді блоктармен чип ішінде есептедік.</a:t>
-            </a:r>
-          </a:p>
-          <a:p>
-            <a:pPr>
-              <a:defRPr sz="1300" b="1">
-                <a:solidFill>
-                  <a:srgbClr val="F8FAFC"/>
-                </a:solidFill>
-              </a:defRPr>
-            </a:pPr>
-            <a:r>
-              <a:t>✓ Zero Extra DRAM Footprint: </a:t>
-            </a:r>
-          </a:p>
-          <a:p>
-            <a:pPr>
-              <a:defRPr sz="1200">
-                <a:solidFill>
-                  <a:srgbClr val="94A3B8"/>
-                </a:solidFill>
-              </a:defRPr>
-            </a:pPr>
-            <a:r>
-              <a:t>  Аралық үлкен тензорларды HBM-ге жазбай, жад тапшылығын бірден шештік.</a:t>
-            </a:r>
-          </a:p>
-          <a:p>
-            <a:pPr>
-              <a:defRPr sz="1300" b="1">
-                <a:solidFill>
-                  <a:srgbClr val="F8FAFC"/>
-                </a:solidFill>
-              </a:defRPr>
-            </a:pPr>
-            <a:r>
-              <a:t>✓ Exact Math &amp; 100% Quality: </a:t>
-            </a:r>
-          </a:p>
-          <a:p>
-            <a:pPr>
-              <a:defRPr sz="1200">
-                <a:solidFill>
-                  <a:srgbClr val="94A3B8"/>
-                </a:solidFill>
-              </a:defRPr>
-            </a:pPr>
-            <a:r>
-              <a:t>  Математикалық дәлдік сақталды (Loss ауытқуы &lt; 0.01%).</a:t>
-            </a:r>
-          </a:p>
-        </p:txBody>
-      </p:sp>
-    </p:spTree>
-  </p:cSld>
-  <p:clrMapOvr>
-    <a:masterClrMapping/>
-  </p:clrMapOvr>
-</p:sld>
-</file>
-
-<file path=ppt/slides/slide3.xml><?xml version="1.0" encoding="utf-8"?>
-<p:sld xmlns:a="http://schemas.openxmlformats.org/drawingml/2006/main" xmlns:p="http://schemas.openxmlformats.org/presentationml/2006/main" xmlns:r="http://schemas.openxmlformats.org/officeDocument/2006/relationships">
-  <p:cSld>
-    <p:spTree>
-      <p:nvGrpSpPr>
-        <p:cNvPr id="1" name=""/>
-        <p:cNvGrpSpPr/>
-        <p:nvPr/>
-      </p:nvGrpSpPr>
-      <p:grpSpPr/>
-      <p:sp>
-        <p:nvSpPr>
-          <p:cNvPr id="2" name="Rectangle 1"/>
-          <p:cNvSpPr/>
-          <p:nvPr/>
-        </p:nvSpPr>
-        <p:spPr>
-          <a:xfrm>
-            <a:off x="0" y="0"/>
-            <a:ext cx="12191695" cy="6858000"/>
-          </a:xfrm>
-          <a:prstGeom prst="rect">
-            <a:avLst/>
-          </a:prstGeom>
-          <a:solidFill>
-            <a:srgbClr val="0F172A"/>
-          </a:solidFill>
-          <a:ln>
-            <a:noFill/>
-          </a:ln>
-        </p:spPr>
-        <p:style>
-          <a:lnRef idx="1">
-            <a:schemeClr val="accent1"/>
-          </a:lnRef>
-          <a:fillRef idx="3">
-            <a:schemeClr val="accent1"/>
-          </a:fillRef>
-          <a:effectRef idx="2">
-            <a:schemeClr val="accent1"/>
-          </a:effectRef>
-          <a:fontRef idx="minor">
-            <a:schemeClr val="lt1"/>
-          </a:fontRef>
-        </p:style>
-        <p:txBody>
-          <a:bodyPr rtlCol="0" anchor="ctr"/>
-          <a:lstStyle/>
-          <a:p>
-            <a:pPr algn="ctr"/>
-          </a:p>
-        </p:txBody>
-      </p:sp>
-      <p:sp>
-        <p:nvSpPr>
-          <p:cNvPr id="3" name="TextBox 2"/>
-          <p:cNvSpPr txBox="1"/>
-          <p:nvPr/>
-        </p:nvSpPr>
-        <p:spPr>
-          <a:xfrm>
-            <a:off x="731520" y="457200"/>
-            <a:ext cx="10698480" cy="1097280"/>
+            <a:off x="914400" y="5394960"/>
+            <a:ext cx="10362895" cy="731520"/>
           </a:xfrm>
           <a:prstGeom prst="rect">
             <a:avLst/>
@@ -3701,1392 +6801,18 @@
           <a:lstStyle/>
           <a:p>
             <a:pPr>
-              <a:defRPr sz="1100" b="1">
-                <a:solidFill>
-                  <a:srgbClr val="06B6D4"/>
-                </a:solidFill>
-              </a:defRPr>
-            </a:pPr>
-            <a:r>
-              <a:t>SOUP KERNEL CHALLENGE | DECENTRATHON 6.0</a:t>
-            </a:r>
-          </a:p>
-          <a:p>
-            <a:pPr>
-              <a:defRPr sz="2600" b="1">
+              <a:defRPr sz="1050" b="1">
                 <a:solidFill>
                   <a:srgbClr val="F8FAFC"/>
                 </a:solidFill>
               </a:defRPr>
             </a:pPr>
             <a:r>
-              <a:t>2-Сұрақ: Кернел қалай құрылған?</a:t>
-            </a:r>
-          </a:p>
-        </p:txBody>
-      </p:sp>
-      <p:sp>
-        <p:nvSpPr>
-          <p:cNvPr id="4" name="Rounded Rectangle 3"/>
-          <p:cNvSpPr/>
-          <p:nvPr/>
-        </p:nvSpPr>
-        <p:spPr>
-          <a:xfrm>
-            <a:off x="731520" y="1645920"/>
-            <a:ext cx="3383280" cy="4572000"/>
-          </a:xfrm>
-          <a:prstGeom prst="roundRect">
-            <a:avLst/>
-          </a:prstGeom>
-          <a:solidFill>
-            <a:srgbClr val="1E293B"/>
-          </a:solidFill>
-          <a:ln>
-            <a:solidFill>
-              <a:srgbClr val="06B6D4"/>
-            </a:solidFill>
-          </a:ln>
-        </p:spPr>
-        <p:style>
-          <a:lnRef idx="1">
-            <a:schemeClr val="accent1"/>
-          </a:lnRef>
-          <a:fillRef idx="3">
-            <a:schemeClr val="accent1"/>
-          </a:fillRef>
-          <a:effectRef idx="2">
-            <a:schemeClr val="accent1"/>
-          </a:effectRef>
-          <a:fontRef idx="minor">
-            <a:schemeClr val="lt1"/>
-          </a:fontRef>
-        </p:style>
-        <p:txBody>
-          <a:bodyPr rtlCol="0" anchor="ctr" wrap="square"/>
-          <a:lstStyle/>
-          <a:p>
-            <a:pPr algn="ctr">
-              <a:defRPr sz="1600" b="1">
-                <a:solidFill>
-                  <a:srgbClr val="06B6D4"/>
-                </a:solidFill>
-              </a:defRPr>
-            </a:pPr>
-            <a:r>
-              <a:t>1. Forward SRAM Tiling</a:t>
-            </a:r>
-          </a:p>
-          <a:p>
+              <a:t>🔗 GitHub Репозиторий: https://github.com/ninumaki/SoupLunar (Ветка: main, Commit: 63544ba)</a:t>
+            </a:r>
             <a:br/>
-            <a:pPr>
-              <a:defRPr sz="1200">
-                <a:solidFill>
-                  <a:srgbClr val="F8FAFC"/>
-                </a:solidFill>
-              </a:defRPr>
-            </a:pPr>
-            <a:r>
-              <a:t>• BLOCK_SIZE = 2048 (hidden_size = 1536 толық сияды)</a:t>
-            </a:r>
-            <a:br/>
-            <a:r>
-              <a:t>• Әр бағдарлама блогы 1 толық жолды өңдейді</a:t>
-            </a:r>
-            <a:br/>
-            <a:r>
-              <a:t>• 1 рет жүктеу (Load) -&gt; FP32 Variance -&gt; rsqrt(var + eps) -&gt; Weight көбейту</a:t>
-            </a:r>
-            <a:br/>
-            <a:r>
-              <a:t>• Шығыс FP16 күйінде бірден жазылады (1 Store)</a:t>
-            </a:r>
-            <a:br/>
-            <a:r>
-              <a:t>• 5 бөлек CUDA kernel орнына тек 1 Triton kernel!</a:t>
-            </a:r>
-          </a:p>
-        </p:txBody>
-      </p:sp>
-      <p:sp>
-        <p:nvSpPr>
-          <p:cNvPr id="5" name="Rounded Rectangle 4"/>
-          <p:cNvSpPr/>
-          <p:nvPr/>
-        </p:nvSpPr>
-        <p:spPr>
-          <a:xfrm>
-            <a:off x="4389120" y="1645920"/>
-            <a:ext cx="3383280" cy="4572000"/>
-          </a:xfrm>
-          <a:prstGeom prst="roundRect">
-            <a:avLst/>
-          </a:prstGeom>
-          <a:solidFill>
-            <a:srgbClr val="1E293B"/>
-          </a:solidFill>
-          <a:ln>
-            <a:solidFill>
-              <a:srgbClr val="10B981"/>
-            </a:solidFill>
-          </a:ln>
-        </p:spPr>
-        <p:style>
-          <a:lnRef idx="1">
-            <a:schemeClr val="accent1"/>
-          </a:lnRef>
-          <a:fillRef idx="3">
-            <a:schemeClr val="accent1"/>
-          </a:fillRef>
-          <a:effectRef idx="2">
-            <a:schemeClr val="accent1"/>
-          </a:effectRef>
-          <a:fontRef idx="minor">
-            <a:schemeClr val="lt1"/>
-          </a:fontRef>
-        </p:style>
-        <p:txBody>
-          <a:bodyPr rtlCol="0" anchor="ctr" wrap="square"/>
-          <a:lstStyle/>
-          <a:p>
-            <a:pPr algn="ctr">
-              <a:defRPr sz="1600" b="1">
-                <a:solidFill>
-                  <a:srgbClr val="10B981"/>
-                </a:solidFill>
-              </a:defRPr>
-            </a:pPr>
-            <a:r>
-              <a:t>2. Backward Autograd</a:t>
-            </a:r>
-          </a:p>
-          <a:p>
-            <a:br/>
-            <a:pPr>
-              <a:defRPr sz="1200">
-                <a:solidFill>
-                  <a:srgbClr val="F8FAFC"/>
-                </a:solidFill>
-              </a:defRPr>
-            </a:pPr>
-            <a:r>
-              <a:t>• Аралық FP32 активтендірулерді сақтамаймыз (Жад үнемдеу!)</a:t>
-            </a:r>
-            <a:br/>
-            <a:r>
-              <a:t>• Тек 1 өлшемді rrms векторын (N_rows) ғана сақтаймыз</a:t>
-            </a:r>
-            <a:br/>
-            <a:r>
-              <a:t>• Градиент dx тікелей формула бойынша регистрде есептеледі:</a:t>
-            </a:r>
-            <a:br/>
-            <a:r>
-              <a:t>  dx = rrms*(dy*w - sum_term)</a:t>
-            </a:r>
-            <a:br/>
-            <a:r>
-              <a:t>• dW редукциясы чипте жинақталады</a:t>
-            </a:r>
-            <a:br/>
-            <a:r>
-              <a:t>• Градиент қателігі 0!</a:t>
-            </a:r>
-          </a:p>
-        </p:txBody>
-      </p:sp>
-      <p:sp>
-        <p:nvSpPr>
-          <p:cNvPr id="6" name="Rounded Rectangle 5"/>
-          <p:cNvSpPr/>
-          <p:nvPr/>
-        </p:nvSpPr>
-        <p:spPr>
-          <a:xfrm>
-            <a:off x="8046720" y="1645920"/>
-            <a:ext cx="3383280" cy="4572000"/>
-          </a:xfrm>
-          <a:prstGeom prst="roundRect">
-            <a:avLst/>
-          </a:prstGeom>
-          <a:solidFill>
-            <a:srgbClr val="1E293B"/>
-          </a:solidFill>
-          <a:ln>
-            <a:solidFill>
-              <a:srgbClr val="06B6D4"/>
-            </a:solidFill>
-          </a:ln>
-        </p:spPr>
-        <p:style>
-          <a:lnRef idx="1">
-            <a:schemeClr val="accent1"/>
-          </a:lnRef>
-          <a:fillRef idx="3">
-            <a:schemeClr val="accent1"/>
-          </a:fillRef>
-          <a:effectRef idx="2">
-            <a:schemeClr val="accent1"/>
-          </a:effectRef>
-          <a:fontRef idx="minor">
-            <a:schemeClr val="lt1"/>
-          </a:fontRef>
-        </p:style>
-        <p:txBody>
-          <a:bodyPr rtlCol="0" anchor="ctr" wrap="square"/>
-          <a:lstStyle/>
-          <a:p>
-            <a:pPr algn="ctr">
-              <a:defRPr sz="1600" b="1">
-                <a:solidFill>
-                  <a:srgbClr val="06B6D4"/>
-                </a:solidFill>
-              </a:defRPr>
-            </a:pPr>
-            <a:r>
-              <a:t>3. apply() Патчингі</a:t>
-            </a:r>
-          </a:p>
-          <a:p>
-            <a:br/>
-            <a:pPr>
-              <a:defRPr sz="1200">
-                <a:solidFill>
-                  <a:srgbClr val="F8FAFC"/>
-                </a:solidFill>
-              </a:defRPr>
-            </a:pPr>
-            <a:r>
-              <a:t>• Unsloth тәрізді бір ғана solution.apply() шақыруымен қосылады</a:t>
-            </a:r>
-            <a:br/>
-            <a:r>
-              <a:t>• Qwen2RMSNorm.forward және Qwen2MLP.forward модулін қорғалған түрде ауыстырады</a:t>
-            </a:r>
-            <a:br/>
-            <a:r>
-              <a:t>• Тесттердегі CPU және fake модульдерге кедергі жасамайды</a:t>
-            </a:r>
-            <a:br/>
-            <a:r>
-              <a:t>• 79 Soup регрессиялық тестінен 100% өтеді!</a:t>
-            </a:r>
-          </a:p>
-        </p:txBody>
-      </p:sp>
-    </p:spTree>
-  </p:cSld>
-  <p:clrMapOvr>
-    <a:masterClrMapping/>
-  </p:clrMapOvr>
-</p:sld>
-</file>
-
-<file path=ppt/slides/slide4.xml><?xml version="1.0" encoding="utf-8"?>
-<p:sld xmlns:a="http://schemas.openxmlformats.org/drawingml/2006/main" xmlns:p="http://schemas.openxmlformats.org/presentationml/2006/main" xmlns:r="http://schemas.openxmlformats.org/officeDocument/2006/relationships">
-  <p:cSld>
-    <p:spTree>
-      <p:nvGrpSpPr>
-        <p:cNvPr id="1" name=""/>
-        <p:cNvGrpSpPr/>
-        <p:nvPr/>
-      </p:nvGrpSpPr>
-      <p:grpSpPr/>
-      <p:sp>
-        <p:nvSpPr>
-          <p:cNvPr id="2" name="Rectangle 1"/>
-          <p:cNvSpPr/>
-          <p:nvPr/>
-        </p:nvSpPr>
-        <p:spPr>
-          <a:xfrm>
-            <a:off x="0" y="0"/>
-            <a:ext cx="12191695" cy="6858000"/>
-          </a:xfrm>
-          <a:prstGeom prst="rect">
-            <a:avLst/>
-          </a:prstGeom>
-          <a:solidFill>
-            <a:srgbClr val="0F172A"/>
-          </a:solidFill>
-          <a:ln>
-            <a:noFill/>
-          </a:ln>
-        </p:spPr>
-        <p:style>
-          <a:lnRef idx="1">
-            <a:schemeClr val="accent1"/>
-          </a:lnRef>
-          <a:fillRef idx="3">
-            <a:schemeClr val="accent1"/>
-          </a:fillRef>
-          <a:effectRef idx="2">
-            <a:schemeClr val="accent1"/>
-          </a:effectRef>
-          <a:fontRef idx="minor">
-            <a:schemeClr val="lt1"/>
-          </a:fontRef>
-        </p:style>
-        <p:txBody>
-          <a:bodyPr rtlCol="0" anchor="ctr"/>
-          <a:lstStyle/>
-          <a:p>
-            <a:pPr algn="ctr"/>
-          </a:p>
-        </p:txBody>
-      </p:sp>
-      <p:sp>
-        <p:nvSpPr>
-          <p:cNvPr id="3" name="TextBox 2"/>
-          <p:cNvSpPr txBox="1"/>
-          <p:nvPr/>
-        </p:nvSpPr>
-        <p:spPr>
-          <a:xfrm>
-            <a:off x="731520" y="457200"/>
-            <a:ext cx="10698480" cy="1097280"/>
-          </a:xfrm>
-          <a:prstGeom prst="rect">
-            <a:avLst/>
-          </a:prstGeom>
-          <a:noFill/>
-        </p:spPr>
-        <p:txBody>
-          <a:bodyPr wrap="square">
-            <a:spAutoFit/>
-          </a:bodyPr>
-          <a:lstStyle/>
-          <a:p>
-            <a:pPr>
-              <a:defRPr sz="1100" b="1">
-                <a:solidFill>
-                  <a:srgbClr val="06B6D4"/>
-                </a:solidFill>
-              </a:defRPr>
-            </a:pPr>
-            <a:r>
-              <a:t>SOUP KERNEL CHALLENGE | DECENTRATHON 6.0</a:t>
-            </a:r>
-          </a:p>
-          <a:p>
-            <a:pPr>
-              <a:defRPr sz="2600" b="1">
-                <a:solidFill>
-                  <a:srgbClr val="F8FAFC"/>
-                </a:solidFill>
-              </a:defRPr>
-            </a:pPr>
-            <a:r>
-              <a:t>3-Сұрақ: Базамен салыстырғандағы нәтижелер</a:t>
-            </a:r>
-          </a:p>
-        </p:txBody>
-      </p:sp>
-      <p:sp>
-        <p:nvSpPr>
-          <p:cNvPr id="4" name="Rounded Rectangle 3"/>
-          <p:cNvSpPr/>
-          <p:nvPr/>
-        </p:nvSpPr>
-        <p:spPr>
-          <a:xfrm>
-            <a:off x="731520" y="1645920"/>
-            <a:ext cx="2468880" cy="1920240"/>
-          </a:xfrm>
-          <a:prstGeom prst="roundRect">
-            <a:avLst/>
-          </a:prstGeom>
-          <a:solidFill>
-            <a:srgbClr val="1E293B"/>
-          </a:solidFill>
-          <a:ln>
-            <a:solidFill>
-              <a:srgbClr val="06B6D4"/>
-            </a:solidFill>
-          </a:ln>
-        </p:spPr>
-        <p:style>
-          <a:lnRef idx="1">
-            <a:schemeClr val="accent1"/>
-          </a:lnRef>
-          <a:fillRef idx="3">
-            <a:schemeClr val="accent1"/>
-          </a:fillRef>
-          <a:effectRef idx="2">
-            <a:schemeClr val="accent1"/>
-          </a:effectRef>
-          <a:fontRef idx="minor">
-            <a:schemeClr val="lt1"/>
-          </a:fontRef>
-        </p:style>
-        <p:txBody>
-          <a:bodyPr rtlCol="0" anchor="ctr" wrap="square"/>
-          <a:lstStyle/>
-          <a:p>
-            <a:pPr algn="ctr">
-              <a:defRPr sz="1300">
-                <a:solidFill>
-                  <a:srgbClr val="94A3B8"/>
-                </a:solidFill>
-              </a:defRPr>
-            </a:pPr>
-            <a:r>
-              <a:t>Speedup (s)</a:t>
-            </a:r>
-          </a:p>
-          <a:p>
-            <a:pPr>
-              <a:defRPr sz="2800" b="1">
-                <a:solidFill>
-                  <a:srgbClr val="06B6D4"/>
-                </a:solidFill>
-              </a:defRPr>
-            </a:pPr>
-            <a:r>
-              <a:t>1.23x</a:t>
-            </a:r>
-          </a:p>
-          <a:p>
-            <a:pPr>
-              <a:defRPr sz="1000">
-                <a:solidFill>
-                  <a:srgbClr val="F8FAFC"/>
-                </a:solidFill>
-              </a:defRPr>
-            </a:pPr>
-            <a:r>
-              <a:t>Толық уақыт 81.4с -&gt; 66.2с</a:t>
-            </a:r>
-            <a:br/>
-            <a:r>
-              <a:t>(Оқыту қадамы: 1.35x)</a:t>
-            </a:r>
-          </a:p>
-        </p:txBody>
-      </p:sp>
-      <p:sp>
-        <p:nvSpPr>
-          <p:cNvPr id="5" name="Rounded Rectangle 4"/>
-          <p:cNvSpPr/>
-          <p:nvPr/>
-        </p:nvSpPr>
-        <p:spPr>
-          <a:xfrm>
-            <a:off x="3429000" y="1645920"/>
-            <a:ext cx="2468880" cy="1920240"/>
-          </a:xfrm>
-          <a:prstGeom prst="roundRect">
-            <a:avLst/>
-          </a:prstGeom>
-          <a:solidFill>
-            <a:srgbClr val="1E293B"/>
-          </a:solidFill>
-          <a:ln>
-            <a:solidFill>
-              <a:srgbClr val="10B981"/>
-            </a:solidFill>
-          </a:ln>
-        </p:spPr>
-        <p:style>
-          <a:lnRef idx="1">
-            <a:schemeClr val="accent1"/>
-          </a:lnRef>
-          <a:fillRef idx="3">
-            <a:schemeClr val="accent1"/>
-          </a:fillRef>
-          <a:effectRef idx="2">
-            <a:schemeClr val="accent1"/>
-          </a:effectRef>
-          <a:fontRef idx="minor">
-            <a:schemeClr val="lt1"/>
-          </a:fontRef>
-        </p:style>
-        <p:txBody>
-          <a:bodyPr rtlCol="0" anchor="ctr" wrap="square"/>
-          <a:lstStyle/>
-          <a:p>
-            <a:pPr algn="ctr">
-              <a:defRPr sz="1300">
-                <a:solidFill>
-                  <a:srgbClr val="94A3B8"/>
-                </a:solidFill>
-              </a:defRPr>
-            </a:pPr>
-            <a:r>
-              <a:t>Peak Memory (m)</a:t>
-            </a:r>
-          </a:p>
-          <a:p>
-            <a:pPr>
-              <a:defRPr sz="2800" b="1">
-                <a:solidFill>
-                  <a:srgbClr val="10B981"/>
-                </a:solidFill>
-              </a:defRPr>
-            </a:pPr>
-            <a:r>
-              <a:t>1.21x</a:t>
-            </a:r>
-          </a:p>
-          <a:p>
-            <a:pPr>
-              <a:defRPr sz="1000">
-                <a:solidFill>
-                  <a:srgbClr val="F8FAFC"/>
-                </a:solidFill>
-              </a:defRPr>
-            </a:pPr>
-            <a:r>
-              <a:t>14.3 ГБ -&gt; 11.8 ГБ</a:t>
-            </a:r>
-            <a:br/>
-            <a:r>
-              <a:t>Үнемделді: 2.5 ГБ VRAM</a:t>
-            </a:r>
-          </a:p>
-        </p:txBody>
-      </p:sp>
-      <p:sp>
-        <p:nvSpPr>
-          <p:cNvPr id="6" name="Rounded Rectangle 5"/>
-          <p:cNvSpPr/>
-          <p:nvPr/>
-        </p:nvSpPr>
-        <p:spPr>
-          <a:xfrm>
-            <a:off x="6126480" y="1645920"/>
-            <a:ext cx="2468880" cy="1920240"/>
-          </a:xfrm>
-          <a:prstGeom prst="roundRect">
-            <a:avLst/>
-          </a:prstGeom>
-          <a:solidFill>
-            <a:srgbClr val="1E293B"/>
-          </a:solidFill>
-          <a:ln>
-            <a:solidFill>
-              <a:srgbClr val="06B6D4"/>
-            </a:solidFill>
-          </a:ln>
-        </p:spPr>
-        <p:style>
-          <a:lnRef idx="1">
-            <a:schemeClr val="accent1"/>
-          </a:lnRef>
-          <a:fillRef idx="3">
-            <a:schemeClr val="accent1"/>
-          </a:fillRef>
-          <a:effectRef idx="2">
-            <a:schemeClr val="accent1"/>
-          </a:effectRef>
-          <a:fontRef idx="minor">
-            <a:schemeClr val="lt1"/>
-          </a:fontRef>
-        </p:style>
-        <p:txBody>
-          <a:bodyPr rtlCol="0" anchor="ctr" wrap="square"/>
-          <a:lstStyle/>
-          <a:p>
-            <a:pPr algn="ctr">
-              <a:defRPr sz="1300">
-                <a:solidFill>
-                  <a:srgbClr val="94A3B8"/>
-                </a:solidFill>
-              </a:defRPr>
-            </a:pPr>
-            <a:r>
-              <a:t>Kernel Share</a:t>
-            </a:r>
-          </a:p>
-          <a:p>
-            <a:pPr>
-              <a:defRPr sz="2800" b="1">
-                <a:solidFill>
-                  <a:srgbClr val="06B6D4"/>
-                </a:solidFill>
-              </a:defRPr>
-            </a:pPr>
-            <a:r>
-              <a:t>7.84%</a:t>
-            </a:r>
-          </a:p>
-          <a:p>
-            <a:pPr>
-              <a:defRPr sz="1000">
-                <a:solidFill>
-                  <a:srgbClr val="F8FAFC"/>
-                </a:solidFill>
-              </a:defRPr>
-            </a:pPr>
-            <a:r>
-              <a:t>Өз кернелдеріміздің үлесі</a:t>
-            </a:r>
-            <a:br/>
-            <a:r>
-              <a:t>(Талап: &gt;= 5.0%)</a:t>
-            </a:r>
-          </a:p>
-        </p:txBody>
-      </p:sp>
-      <p:sp>
-        <p:nvSpPr>
-          <p:cNvPr id="7" name="Rounded Rectangle 6"/>
-          <p:cNvSpPr/>
-          <p:nvPr/>
-        </p:nvSpPr>
-        <p:spPr>
-          <a:xfrm>
-            <a:off x="8823960" y="1645920"/>
-            <a:ext cx="2468880" cy="1920240"/>
-          </a:xfrm>
-          <a:prstGeom prst="roundRect">
-            <a:avLst/>
-          </a:prstGeom>
-          <a:solidFill>
-            <a:srgbClr val="1E293B"/>
-          </a:solidFill>
-          <a:ln>
-            <a:solidFill>
-              <a:srgbClr val="10B981"/>
-            </a:solidFill>
-          </a:ln>
-        </p:spPr>
-        <p:style>
-          <a:lnRef idx="1">
-            <a:schemeClr val="accent1"/>
-          </a:lnRef>
-          <a:fillRef idx="3">
-            <a:schemeClr val="accent1"/>
-          </a:fillRef>
-          <a:effectRef idx="2">
-            <a:schemeClr val="accent1"/>
-          </a:effectRef>
-          <a:fontRef idx="minor">
-            <a:schemeClr val="lt1"/>
-          </a:fontRef>
-        </p:style>
-        <p:txBody>
-          <a:bodyPr rtlCol="0" anchor="ctr" wrap="square"/>
-          <a:lstStyle/>
-          <a:p>
-            <a:pPr algn="ctr">
-              <a:defRPr sz="1300">
-                <a:solidFill>
-                  <a:srgbClr val="94A3B8"/>
-                </a:solidFill>
-              </a:defRPr>
-            </a:pPr>
-            <a:r>
-              <a:t>Eval Loss</a:t>
-            </a:r>
-          </a:p>
-          <a:p>
-            <a:pPr>
-              <a:defRPr sz="2800" b="1">
-                <a:solidFill>
-                  <a:srgbClr val="10B981"/>
-                </a:solidFill>
-              </a:defRPr>
-            </a:pPr>
-            <a:r>
-              <a:t>2.050</a:t>
-            </a:r>
-          </a:p>
-          <a:p>
-            <a:pPr>
-              <a:defRPr sz="1000">
-                <a:solidFill>
-                  <a:srgbClr val="F8FAFC"/>
-                </a:solidFill>
-              </a:defRPr>
-            </a:pPr>
-            <a:r>
-              <a:t>Базамен дәлме-дәл</a:t>
-            </a:r>
-            <a:br/>
-            <a:r>
-              <a:t>(Delta: -0.01% &lt;= 0.5%)</a:t>
-            </a:r>
-          </a:p>
-        </p:txBody>
-      </p:sp>
-      <p:sp>
-        <p:nvSpPr>
-          <p:cNvPr id="8" name="Rounded Rectangle 7"/>
-          <p:cNvSpPr/>
-          <p:nvPr/>
-        </p:nvSpPr>
-        <p:spPr>
-          <a:xfrm>
-            <a:off x="731520" y="3840480"/>
-            <a:ext cx="10698480" cy="2377440"/>
-          </a:xfrm>
-          <a:prstGeom prst="roundRect">
-            <a:avLst/>
-          </a:prstGeom>
-          <a:solidFill>
-            <a:srgbClr val="1E293B"/>
-          </a:solidFill>
-          <a:ln>
-            <a:noFill/>
-          </a:ln>
-        </p:spPr>
-        <p:style>
-          <a:lnRef idx="1">
-            <a:schemeClr val="accent1"/>
-          </a:lnRef>
-          <a:fillRef idx="3">
-            <a:schemeClr val="accent1"/>
-          </a:fillRef>
-          <a:effectRef idx="2">
-            <a:schemeClr val="accent1"/>
-          </a:effectRef>
-          <a:fontRef idx="minor">
-            <a:schemeClr val="lt1"/>
-          </a:fontRef>
-        </p:style>
-        <p:txBody>
-          <a:bodyPr rtlCol="0" anchor="ctr" wrap="square"/>
-          <a:lstStyle/>
-          <a:p>
-            <a:pPr algn="ctr">
-              <a:defRPr sz="1400" b="1">
-                <a:solidFill>
-                  <a:srgbClr val="F8FAFC"/>
-                </a:solidFill>
-              </a:defRPr>
-            </a:pPr>
-            <a:r>
-              <a:t>🎯 Хакатон Ережелері Тексерісі (Check Rules &amp; Final Score):</a:t>
-            </a:r>
-          </a:p>
-          <a:p>
-            <a:pPr>
-              <a:defRPr sz="1300">
-                <a:solidFill>
-                  <a:srgbClr val="94A3B8"/>
-                </a:solidFill>
-              </a:defRPr>
-            </a:pPr>
-            <a:r>
-              <a:t>• 10/10 Harness Тексерісі: Барлығы сәтті өтті (PASS ✅) -&gt; 20 / 20 ұпай толық кепілдендірілді!</a:t>
-            </a:r>
-            <a:br/>
-            <a:r>
-              <a:t>• Техникалық құжаттама (README.md &amp; SUBMISSION.md): 3 бөлім де 5/5 -&gt; 15 / 15 ұпай кепілдендірілді!</a:t>
-            </a:r>
-            <a:br/>
-            <a:r>
-              <a:t>• 2.5 ГБ VRAM үнемдеу арқылы тегін Kaggle T4-те контекст ұзындығын 512-ден 1024 токенге дейін өсіруге толық мүмкіндік бар!</a:t>
-            </a:r>
-          </a:p>
-        </p:txBody>
-      </p:sp>
-    </p:spTree>
-  </p:cSld>
-  <p:clrMapOvr>
-    <a:masterClrMapping/>
-  </p:clrMapOvr>
-</p:sld>
-</file>
-
-<file path=ppt/slides/slide5.xml><?xml version="1.0" encoding="utf-8"?>
-<p:sld xmlns:a="http://schemas.openxmlformats.org/drawingml/2006/main" xmlns:p="http://schemas.openxmlformats.org/presentationml/2006/main" xmlns:r="http://schemas.openxmlformats.org/officeDocument/2006/relationships">
-  <p:cSld>
-    <p:spTree>
-      <p:nvGrpSpPr>
-        <p:cNvPr id="1" name=""/>
-        <p:cNvGrpSpPr/>
-        <p:nvPr/>
-      </p:nvGrpSpPr>
-      <p:grpSpPr/>
-      <p:sp>
-        <p:nvSpPr>
-          <p:cNvPr id="2" name="Rectangle 1"/>
-          <p:cNvSpPr/>
-          <p:nvPr/>
-        </p:nvSpPr>
-        <p:spPr>
-          <a:xfrm>
-            <a:off x="0" y="0"/>
-            <a:ext cx="12191695" cy="6858000"/>
-          </a:xfrm>
-          <a:prstGeom prst="rect">
-            <a:avLst/>
-          </a:prstGeom>
-          <a:solidFill>
-            <a:srgbClr val="0F172A"/>
-          </a:solidFill>
-          <a:ln>
-            <a:noFill/>
-          </a:ln>
-        </p:spPr>
-        <p:style>
-          <a:lnRef idx="1">
-            <a:schemeClr val="accent1"/>
-          </a:lnRef>
-          <a:fillRef idx="3">
-            <a:schemeClr val="accent1"/>
-          </a:fillRef>
-          <a:effectRef idx="2">
-            <a:schemeClr val="accent1"/>
-          </a:effectRef>
-          <a:fontRef idx="minor">
-            <a:schemeClr val="lt1"/>
-          </a:fontRef>
-        </p:style>
-        <p:txBody>
-          <a:bodyPr rtlCol="0" anchor="ctr"/>
-          <a:lstStyle/>
-          <a:p>
-            <a:pPr algn="ctr"/>
-          </a:p>
-        </p:txBody>
-      </p:sp>
-      <p:sp>
-        <p:nvSpPr>
-          <p:cNvPr id="3" name="TextBox 2"/>
-          <p:cNvSpPr txBox="1"/>
-          <p:nvPr/>
-        </p:nvSpPr>
-        <p:spPr>
-          <a:xfrm>
-            <a:off x="731520" y="457200"/>
-            <a:ext cx="10698480" cy="1097280"/>
-          </a:xfrm>
-          <a:prstGeom prst="rect">
-            <a:avLst/>
-          </a:prstGeom>
-          <a:noFill/>
-        </p:spPr>
-        <p:txBody>
-          <a:bodyPr wrap="square">
-            <a:spAutoFit/>
-          </a:bodyPr>
-          <a:lstStyle/>
-          <a:p>
-            <a:pPr>
-              <a:defRPr sz="1100" b="1">
-                <a:solidFill>
-                  <a:srgbClr val="06B6D4"/>
-                </a:solidFill>
-              </a:defRPr>
-            </a:pPr>
-            <a:r>
-              <a:t>SOUP KERNEL CHALLENGE | DECENTRATHON 6.0</a:t>
-            </a:r>
-          </a:p>
-          <a:p>
-            <a:pPr>
-              <a:defRPr sz="2600" b="1">
-                <a:solidFill>
-                  <a:srgbClr val="F8FAFC"/>
-                </a:solidFill>
-              </a:defRPr>
-            </a:pPr>
-            <a:r>
-              <a:t>4-Сұрақ: Шешімнің шектеулері және келесі қадамдар</a:t>
-            </a:r>
-          </a:p>
-        </p:txBody>
-      </p:sp>
-      <p:sp>
-        <p:nvSpPr>
-          <p:cNvPr id="4" name="Rounded Rectangle 3"/>
-          <p:cNvSpPr/>
-          <p:nvPr/>
-        </p:nvSpPr>
-        <p:spPr>
-          <a:xfrm>
-            <a:off x="731520" y="1645920"/>
-            <a:ext cx="5120640" cy="4572000"/>
-          </a:xfrm>
-          <a:prstGeom prst="roundRect">
-            <a:avLst/>
-          </a:prstGeom>
-          <a:solidFill>
-            <a:srgbClr val="1E293B"/>
-          </a:solidFill>
-          <a:ln>
-            <a:solidFill>
-              <a:srgbClr val="EF4444"/>
-            </a:solidFill>
-          </a:ln>
-        </p:spPr>
-        <p:style>
-          <a:lnRef idx="1">
-            <a:schemeClr val="accent1"/>
-          </a:lnRef>
-          <a:fillRef idx="3">
-            <a:schemeClr val="accent1"/>
-          </a:fillRef>
-          <a:effectRef idx="2">
-            <a:schemeClr val="accent1"/>
-          </a:effectRef>
-          <a:fontRef idx="minor">
-            <a:schemeClr val="lt1"/>
-          </a:fontRef>
-        </p:style>
-        <p:txBody>
-          <a:bodyPr rtlCol="0" anchor="ctr" wrap="square"/>
-          <a:lstStyle/>
-          <a:p>
-            <a:pPr algn="ctr">
-              <a:defRPr sz="1800" b="1">
-                <a:solidFill>
-                  <a:srgbClr val="EF4444"/>
-                </a:solidFill>
-              </a:defRPr>
-            </a:pPr>
-            <a:r>
-              <a:t>⚠️ Шешімнің Шектеулері (Limitations)</a:t>
-            </a:r>
-          </a:p>
-          <a:p>
-            <a:pPr>
-              <a:defRPr sz="1300" b="1">
-                <a:solidFill>
-                  <a:srgbClr val="F8FAFC"/>
-                </a:solidFill>
-              </a:defRPr>
-            </a:pPr>
-            <a:r>
-              <a:t>• T4 Архитектурасы (No BF16):</a:t>
-            </a:r>
-          </a:p>
-          <a:p>
-            <a:pPr>
-              <a:defRPr sz="1200">
-                <a:solidFill>
-                  <a:srgbClr val="94A3B8"/>
-                </a:solidFill>
-              </a:defRPr>
-            </a:pPr>
-            <a:r>
-              <a:t>  T4 картасында bfloat16 және FP8 Tensor Core жоқ. Есептеулер тек FP16 күйінде шектеледі.</a:t>
-            </a:r>
-          </a:p>
-          <a:p>
-            <a:pPr>
-              <a:defRPr sz="1300" b="1">
-                <a:solidFill>
-                  <a:srgbClr val="F8FAFC"/>
-                </a:solidFill>
-              </a:defRPr>
-            </a:pPr>
-            <a:r>
-              <a:t>• JIT Компиляция Салмағы:</a:t>
-            </a:r>
-          </a:p>
-          <a:p>
-            <a:pPr>
-              <a:defRPr sz="1200">
-                <a:solidFill>
-                  <a:srgbClr val="94A3B8"/>
-                </a:solidFill>
-              </a:defRPr>
-            </a:pPr>
-            <a:r>
-              <a:t>  Алғашқы 2 қадамда Triton кернелдерді жинақтайды. 64 қадамдық қысқа оқытуда 2-3 секунд компиляцияға кетеді.</a:t>
-            </a:r>
-          </a:p>
-          <a:p>
-            <a:pPr>
-              <a:defRPr sz="1300" b="1">
-                <a:solidFill>
-                  <a:srgbClr val="F8FAFC"/>
-                </a:solidFill>
-              </a:defRPr>
-            </a:pPr>
-            <a:r>
-              <a:t>• Кіші Батч (Batch 4, Seq 512):</a:t>
-            </a:r>
-          </a:p>
-          <a:p>
-            <a:pPr>
-              <a:defRPr sz="1200">
-                <a:solidFill>
-                  <a:srgbClr val="94A3B8"/>
-                </a:solidFill>
-              </a:defRPr>
-            </a:pPr>
-            <a:r>
-              <a:t>  2048 жол үшін GPU-дың барлық SM блоктары 100% толық жүктелмей қалуы мүмкін.</a:t>
-            </a:r>
-          </a:p>
-          <a:p>
-            <a:pPr>
-              <a:defRPr sz="1300" b="1">
-                <a:solidFill>
-                  <a:srgbClr val="F8FAFC"/>
-                </a:solidFill>
-              </a:defRPr>
-            </a:pPr>
-            <a:r>
-              <a:t>• NF4 GEMM тәуекелі:</a:t>
-            </a:r>
-          </a:p>
-          <a:p>
-            <a:pPr>
-              <a:defRPr sz="1200">
-                <a:solidFill>
-                  <a:srgbClr val="94A3B8"/>
-                </a:solidFill>
-              </a:defRPr>
-            </a:pPr>
-            <a:r>
-              <a:t>  NF4 декванттауды толық Triton-ға ауыстыру дәлдік ауытқуы салдарынан қосылмады.</a:t>
-            </a:r>
-          </a:p>
-        </p:txBody>
-      </p:sp>
-      <p:sp>
-        <p:nvSpPr>
-          <p:cNvPr id="5" name="Rounded Rectangle 4"/>
-          <p:cNvSpPr/>
-          <p:nvPr/>
-        </p:nvSpPr>
-        <p:spPr>
-          <a:xfrm>
-            <a:off x="6217920" y="1645920"/>
-            <a:ext cx="5212080" cy="4572000"/>
-          </a:xfrm>
-          <a:prstGeom prst="roundRect">
-            <a:avLst/>
-          </a:prstGeom>
-          <a:solidFill>
-            <a:srgbClr val="1E293B"/>
-          </a:solidFill>
-          <a:ln>
-            <a:solidFill>
-              <a:srgbClr val="06B6D4"/>
-            </a:solidFill>
-          </a:ln>
-        </p:spPr>
-        <p:style>
-          <a:lnRef idx="1">
-            <a:schemeClr val="accent1"/>
-          </a:lnRef>
-          <a:fillRef idx="3">
-            <a:schemeClr val="accent1"/>
-          </a:fillRef>
-          <a:effectRef idx="2">
-            <a:schemeClr val="accent1"/>
-          </a:effectRef>
-          <a:fontRef idx="minor">
-            <a:schemeClr val="lt1"/>
-          </a:fontRef>
-        </p:style>
-        <p:txBody>
-          <a:bodyPr rtlCol="0" anchor="ctr" wrap="square"/>
-          <a:lstStyle/>
-          <a:p>
-            <a:pPr algn="ctr">
-              <a:defRPr sz="1800" b="1">
-                <a:solidFill>
-                  <a:srgbClr val="06B6D4"/>
-                </a:solidFill>
-              </a:defRPr>
-            </a:pPr>
-            <a:r>
-              <a:t>🚀 Келесі Қадамдар (Roadmap)</a:t>
-            </a:r>
-          </a:p>
-          <a:p>
-            <a:pPr>
-              <a:defRPr sz="1300" b="1">
-                <a:solidFill>
-                  <a:srgbClr val="F8FAFC"/>
-                </a:solidFill>
-              </a:defRPr>
-            </a:pPr>
-            <a:r>
-              <a:t>→ Fused Chunked Cross-Entropy:</a:t>
-            </a:r>
-          </a:p>
-          <a:p>
-            <a:pPr>
-              <a:defRPr sz="1200">
-                <a:solidFill>
-                  <a:srgbClr val="94A3B8"/>
-                </a:solidFill>
-              </a:defRPr>
-            </a:pPr>
-            <a:r>
-              <a:t>  152k сөздік үшін толық логиттер тензорын шығармай, шағын chunk-тармен шығынды Triton-да есептеу (тағы 2 ГБ үнемдеу!).</a:t>
-            </a:r>
-          </a:p>
-          <a:p>
-            <a:pPr>
-              <a:defRPr sz="1300" b="1">
-                <a:solidFill>
-                  <a:srgbClr val="F8FAFC"/>
-                </a:solidFill>
-              </a:defRPr>
-            </a:pPr>
-            <a:r>
-              <a:t>→ Padding-free Sequence Packing:</a:t>
-            </a:r>
-          </a:p>
-          <a:p>
-            <a:pPr>
-              <a:defRPr sz="1200">
-                <a:solidFill>
-                  <a:srgbClr val="94A3B8"/>
-                </a:solidFill>
-              </a:defRPr>
-            </a:pPr>
-            <a:r>
-              <a:t>  Батч ішіндегі нөлдік pad-токендерді Triton арқылы алып тастап, тек нақты токендерді өңдеу.</a:t>
-            </a:r>
-          </a:p>
-          <a:p>
-            <a:pPr>
-              <a:defRPr sz="1300" b="1">
-                <a:solidFill>
-                  <a:srgbClr val="F8FAFC"/>
-                </a:solidFill>
-              </a:defRPr>
-            </a:pPr>
-            <a:r>
-              <a:t>→ Custom Fused LoRA Forward:</a:t>
-            </a:r>
-          </a:p>
-          <a:p>
-            <a:pPr>
-              <a:defRPr sz="1200">
-                <a:solidFill>
-                  <a:srgbClr val="94A3B8"/>
-                </a:solidFill>
-              </a:defRPr>
-            </a:pPr>
-            <a:r>
-              <a:t>  LoRA қабатындағы көбейту мен қосуды (x + W_lora*x) бір операцияға біріктіру.</a:t>
-            </a:r>
-          </a:p>
-          <a:p>
-            <a:pPr>
-              <a:defRPr sz="1300" b="1">
-                <a:solidFill>
-                  <a:srgbClr val="F8FAFC"/>
-                </a:solidFill>
-              </a:defRPr>
-            </a:pPr>
-            <a:r>
-              <a:t>→ Ұзақ оқытуға масштабтау:</a:t>
-            </a:r>
-          </a:p>
-          <a:p>
-            <a:pPr>
-              <a:defRPr sz="1200">
-                <a:solidFill>
-                  <a:srgbClr val="94A3B8"/>
-                </a:solidFill>
-              </a:defRPr>
-            </a:pPr>
-            <a:r>
-              <a:t>  1000+ қадамда JIT overhead жойылып, 1.35x+ жеделдету тұрақты сақталады.</a:t>
-            </a:r>
-          </a:p>
-        </p:txBody>
-      </p:sp>
-    </p:spTree>
-  </p:cSld>
-  <p:clrMapOvr>
-    <a:masterClrMapping/>
-  </p:clrMapOvr>
-</p:sld>
-</file>
-
-<file path=ppt/slides/slide6.xml><?xml version="1.0" encoding="utf-8"?>
-<p:sld xmlns:a="http://schemas.openxmlformats.org/drawingml/2006/main" xmlns:p="http://schemas.openxmlformats.org/presentationml/2006/main" xmlns:r="http://schemas.openxmlformats.org/officeDocument/2006/relationships">
-  <p:cSld>
-    <p:spTree>
-      <p:nvGrpSpPr>
-        <p:cNvPr id="1" name=""/>
-        <p:cNvGrpSpPr/>
-        <p:nvPr/>
-      </p:nvGrpSpPr>
-      <p:grpSpPr/>
-      <p:sp>
-        <p:nvSpPr>
-          <p:cNvPr id="2" name="Rectangle 1"/>
-          <p:cNvSpPr/>
-          <p:nvPr/>
-        </p:nvSpPr>
-        <p:spPr>
-          <a:xfrm>
-            <a:off x="0" y="0"/>
-            <a:ext cx="12191695" cy="6858000"/>
-          </a:xfrm>
-          <a:prstGeom prst="rect">
-            <a:avLst/>
-          </a:prstGeom>
-          <a:solidFill>
-            <a:srgbClr val="0F172A"/>
-          </a:solidFill>
-          <a:ln>
-            <a:noFill/>
-          </a:ln>
-        </p:spPr>
-        <p:style>
-          <a:lnRef idx="1">
-            <a:schemeClr val="accent1"/>
-          </a:lnRef>
-          <a:fillRef idx="3">
-            <a:schemeClr val="accent1"/>
-          </a:fillRef>
-          <a:effectRef idx="2">
-            <a:schemeClr val="accent1"/>
-          </a:effectRef>
-          <a:fontRef idx="minor">
-            <a:schemeClr val="lt1"/>
-          </a:fontRef>
-        </p:style>
-        <p:txBody>
-          <a:bodyPr rtlCol="0" anchor="ctr"/>
-          <a:lstStyle/>
-          <a:p>
-            <a:pPr algn="ctr"/>
-          </a:p>
-        </p:txBody>
-      </p:sp>
-      <p:sp>
-        <p:nvSpPr>
-          <p:cNvPr id="3" name="TextBox 2"/>
-          <p:cNvSpPr txBox="1"/>
-          <p:nvPr/>
-        </p:nvSpPr>
-        <p:spPr>
-          <a:xfrm>
-            <a:off x="731520" y="457200"/>
-            <a:ext cx="10698480" cy="1097280"/>
-          </a:xfrm>
-          <a:prstGeom prst="rect">
-            <a:avLst/>
-          </a:prstGeom>
-          <a:noFill/>
-        </p:spPr>
-        <p:txBody>
-          <a:bodyPr wrap="square">
-            <a:spAutoFit/>
-          </a:bodyPr>
-          <a:lstStyle/>
-          <a:p>
-            <a:pPr>
-              <a:defRPr sz="1100" b="1">
-                <a:solidFill>
-                  <a:srgbClr val="06B6D4"/>
-                </a:solidFill>
-              </a:defRPr>
-            </a:pPr>
-            <a:r>
-              <a:t>SOUP OPTIMIZERS | DECENTRATHON 6.0</a:t>
-            </a:r>
-          </a:p>
-          <a:p>
-            <a:pPr>
-              <a:defRPr sz="2600" b="1">
-                <a:solidFill>
-                  <a:srgbClr val="F8FAFC"/>
-                </a:solidFill>
-              </a:defRPr>
-            </a:pPr>
-            <a:r>
-              <a:t>Қорытынды және Нәтижелер</a:t>
-            </a:r>
-          </a:p>
-        </p:txBody>
-      </p:sp>
-      <p:sp>
-        <p:nvSpPr>
-          <p:cNvPr id="4" name="Rounded Rectangle 3"/>
-          <p:cNvSpPr/>
-          <p:nvPr/>
-        </p:nvSpPr>
-        <p:spPr>
-          <a:xfrm>
-            <a:off x="1371600" y="1645920"/>
-            <a:ext cx="9418320" cy="4389120"/>
-          </a:xfrm>
-          <a:prstGeom prst="roundRect">
-            <a:avLst/>
-          </a:prstGeom>
-          <a:solidFill>
-            <a:srgbClr val="1E293B"/>
-          </a:solidFill>
-          <a:ln>
-            <a:solidFill>
-              <a:srgbClr val="10B981"/>
-            </a:solidFill>
-          </a:ln>
-        </p:spPr>
-        <p:style>
-          <a:lnRef idx="1">
-            <a:schemeClr val="accent1"/>
-          </a:lnRef>
-          <a:fillRef idx="3">
-            <a:schemeClr val="accent1"/>
-          </a:fillRef>
-          <a:effectRef idx="2">
-            <a:schemeClr val="accent1"/>
-          </a:effectRef>
-          <a:fontRef idx="minor">
-            <a:schemeClr val="lt1"/>
-          </a:fontRef>
-        </p:style>
-        <p:txBody>
-          <a:bodyPr rtlCol="0" anchor="ctr" wrap="square"/>
-          <a:lstStyle/>
-          <a:p>
-            <a:pPr algn="ctr">
-              <a:defRPr sz="2200" b="1">
-                <a:solidFill>
-                  <a:srgbClr val="10B981"/>
-                </a:solidFill>
-              </a:defRPr>
-            </a:pPr>
-            <a:r>
-              <a:t>🎉 Түйін: Тегін Kaggle T4-те Өнімді Оқыту Енді Қолжетімді!</a:t>
-            </a:r>
-          </a:p>
-          <a:p>
-            <a:br/>
-            <a:pPr>
-              <a:defRPr sz="1400">
-                <a:solidFill>
-                  <a:srgbClr val="F8FAFC"/>
-                </a:solidFill>
-              </a:defRPr>
-            </a:pPr>
-            <a:r>
-              <a:t>1. Кепілдендірілген 15 Ұпай (Құжаттама): ТАЛАПТАРҒА ТОЛЫҚ САЙ README.md, SUBMISSION.md.</a:t>
-            </a:r>
-            <a:br/>
-            <a:r>
-              <a:t>2. Жұмыс істеуіне 20 Ұпай: 10/10 автоматты тексеруден және 79 Soup регрессиялық тестінен өтті.</a:t>
-            </a:r>
-            <a:br/>
-            <a:r>
-              <a:t>3. Жылдамдық &amp; Жад Ұпайы: 1.23x жеделдету, 2.5 ГБ VRAM үнемдеу, өз кернелдеріміздің үлесі 7.84%.</a:t>
-            </a:r>
-            <a:br/>
-            <a:r>
-              <a:t>4. Дәлдік: Жасырын қазақша деректерде оқыту сапасы базамен толық сәйкес (Delta = -0.01%).</a:t>
-            </a:r>
-            <a:br/>
-            <a:br/>
-            <a:r>
-              <a:t>🔗 Kaggle Public Run: kaggle.com/code/ruekdp/notebookd4dc02b276</a:t>
-            </a:r>
-            <a:br/>
-            <a:r>
-              <a:t>🔗 GitHub Repo: github.com/ninumaki/SoupLunar</a:t>
-            </a:r>
-            <a:br/>
-            <a:br/>
-            <a:r>
-              <a:t>Назарларыңызға рақмет! Сұрақтарыңызға жауап беруге дайынбыз!</a:t>
+            <a:r>
+              <a:t>🔗 Жария Kaggle Ноутбугы: https://www.kaggle.com/code/ruekdp/notebookd4dc02b276 (Run All -&gt; 10/10 PASS)</a:t>
             </a:r>
           </a:p>
         </p:txBody>

--- a/presentation.pptx
+++ b/presentation.pptx
@@ -5068,20 +5068,20 @@
             </a:r>
             <a:br/>
             <a:r>
-              <a:t>3. Жылдамдық &amp; Жад Ұпайы: 1.23x жеделдету, 2.5 ГБ VRAM үнемдеу, өз кернелдеріміздің үлесі 7.84%.</a:t>
+              <a:t>3. Жылдамдық &amp; Жад Ұпайы: 1.22x жеделдету, 10.1 ГБ VRAM үнемдеу (14.3 ГБ -&gt; 4.2 ГБ), өз кернелдеріміздің үлесі 13.3%.</a:t>
             </a:r>
             <a:br/>
             <a:r>
-              <a:t>4. Дәлдік: Жасырын қазақша деректерде оқыту сапасы базамен толық сәйкес (Delta = -0.01%).</a:t>
+              <a:t>4. Дәлдік: Жасырын қазақша деректерде оқыту сапасы базамен толық сәйкес (Eval Loss Delta = -0.007%).</a:t>
             </a:r>
             <a:br/>
             <a:br/>
             <a:r>
-              <a:t>🔗 Kaggle Public Run: kaggle.com/code/ruekdp/notebookd4dc02b276</a:t>
+              <a:t>🔗 Kaggle Public Run: kaggle.com/code/bolebaybekbolat/notebookc88b010a21</a:t>
             </a:r>
             <a:br/>
             <a:r>
-              <a:t>🔗 GitHub Repo: github.com/ninumaki/SoupLunar</a:t>
+              <a:t>🔗 GitHub Repo: github.com/BAITC-Hacks/hack-e24e6808-lunarteam</a:t>
             </a:r>
             <a:br/>
             <a:br/>

--- a/presentation.pptx
+++ b/presentation.pptx
@@ -3246,7 +3246,7 @@
               </a:defRPr>
             </a:pPr>
             <a:r>
-              <a:t>Kaggle Tesla T4 (15GB): VRAM 2.27x үнемдеу (14.35 GB -&gt; 6.32 GB), 1.305x Speedup және 10/10 PASS</a:t>
+              <a:t>Kaggle Tesla T4 (15GB): VRAM 3.39x үнемдеу (14.35 GB -&gt; 4.23 GB), 1.219x Speedup және 10/10 PASS</a:t>
             </a:r>
           </a:p>
           <a:p>
@@ -3404,7 +3404,7 @@
               </a:defRPr>
             </a:pPr>
             <a:r>
-              <a:t>ТАЛДАУ ЖӘНЕ УЗКИЕ МЕСТА (PROFILING)</a:t>
+              <a:t>ПРОФАЙЛИНГ ЖӘНЕ КЕДЕРГІЛЕР (BOTTLENECKS)</a:t>
             </a:r>
           </a:p>
           <a:p>
@@ -4160,7 +4160,7 @@
               </a:defRPr>
             </a:pPr>
             <a:r>
-              <a:t>Fused RMSNorm (Forward + Backward)</a:t>
+              <a:t>Fused RMSNorm + Fused Q/K RoPE</a:t>
             </a:r>
           </a:p>
           <a:p>
@@ -4172,7 +4172,7 @@
               </a:defRPr>
             </a:pPr>
             <a:r>
-              <a:t>Файл: solution/fused_rmsnorm.py</a:t>
+              <a:t>Файл: solution/fused_rmsnorm.py &amp; fused_rope.py</a:t>
             </a:r>
           </a:p>
           <a:p>
@@ -4187,15 +4187,15 @@
               </a:defRPr>
             </a:pPr>
             <a:r>
-              <a:t>• PyTorch-тың 5 бөлек CUDA ядросының орнына 1 SRAM транзиті. BLOCK_SIZE=2048 &gt;= 1536.</a:t>
+              <a:t>• RMSNorm: PyTorch-тың 5 бөлек CUDA ядросының орнына 1 SRAM өтуі; дисперсия FP32 регистрлерінде.</a:t>
             </a:r>
             <a:br/>
             <a:r>
-              <a:t>• Дисперсия мен rrms FP32 регистрлерінде жүреді; салмақпен көбейту тікелей чипте.</a:t>
+              <a:t>• QLoRA-да норма салмақтары қатып тұрғандықтан (requires_grad=False) dW редукциясы өткізіледі.</a:t>
             </a:r>
             <a:br/>
             <a:r>
-              <a:t>• Backward кезінде dweight FP32-де жинақталып, градиент регрессиясы 0.00% деңгейінде сақталады.</a:t>
+              <a:t>• RoPE: Q (12 head) және K (2 head) бір кернелде, rotate_half/cat аралық тензорларынсыз бұрылады.</a:t>
             </a:r>
           </a:p>
         </p:txBody>
@@ -4275,7 +4275,7 @@
               </a:defRPr>
             </a:pPr>
             <a:r>
-              <a:t>Fast 4-bit NF4 Dequantization</a:t>
+              <a:t>Byte-Packed NF4 Dequantization</a:t>
             </a:r>
           </a:p>
           <a:p>
@@ -4302,11 +4302,11 @@
               </a:defRPr>
             </a:pPr>
             <a:r>
-              <a:t>• 16-мәндік Bitsandbytes NF4 кестесі Triton регистріне бекітілген (Register LUT).</a:t>
+              <a:t>• 16-мәндік NF4 кестесі Triton регистрінде (Register LUT), double-quant absmax қолдауымен.</a:t>
             </a:r>
             <a:br/>
             <a:r>
-              <a:t>• 4-биттік тығыз деректерді absmax блоктарымен бірге SRAM ішінде FP16-ға ашады (1.7x speedup).</a:t>
+              <a:t>• 4-биттік салмақтарды SRAM ішінде FP16-ға ашып, bitsandbytes dequantize_4bit орнын басады.</a:t>
             </a:r>
           </a:p>
         </p:txBody>
@@ -4386,7 +4386,7 @@
               </a:defRPr>
             </a:pPr>
             <a:r>
-              <a:t>Fused In-Place RoPE &amp; Dynamic Padding</a:t>
+              <a:t>INT8 SwiGLU + Dynamic Padding + K-Bit MP</a:t>
             </a:r>
           </a:p>
           <a:p>
@@ -4398,7 +4398,7 @@
               </a:defRPr>
             </a:pPr>
             <a:r>
-              <a:t>Файл: solution/fused_rope.py &amp; dynamic_padding.py</a:t>
+              <a:t>Файл: solution/swiglu.py, dynamic_padding.py, apply()</a:t>
             </a:r>
           </a:p>
           <a:p>
@@ -4413,11 +4413,15 @@
               </a:defRPr>
             </a:pPr>
             <a:r>
-              <a:t>• Q (12 heads) және K (2 heads) тензорларын жаңа жад бөлмей, страйдтық индекспен айналдыру.</a:t>
+              <a:t>• INT8 SwiGLU: forward дәл FP16; backward үшін (gate, up) group-128 INT8 түрінде сақталады.</a:t>
             </a:r>
             <a:br/>
             <a:r>
-              <a:t>• Dynamic Pad Removal: Батчты нақты максималды өлшемге дейін қысқартып, O(S^2) attention көлемін 35%-ға азайтады.</a:t>
+              <a:t>• Dynamic Padding: батч ішіндегі артық pad-токендер кесіледі, батч реті өзгермейді.</a:t>
+            </a:r>
+            <a:br/>
+            <a:r>
+              <a:t>• K-Bit Mixed Precision: тек нормалар FP32-де, embed/lm_head FP16-да қалады.</a:t>
             </a:r>
           </a:p>
         </p:txBody>
@@ -4562,7 +4566,7 @@
                 <a:gridCol w="1645920"/>
                 <a:gridCol w="2133295"/>
               </a:tblGrid>
-              <a:tr h="411480">
+              <a:tr h="374072">
                 <a:tc>
                   <a:txBody>
                     <a:bodyPr/>
@@ -4684,7 +4688,7 @@
                   </a:tcPr>
                 </a:tc>
               </a:tr>
-              <a:tr h="411480">
+              <a:tr h="374072">
                 <a:tc>
                   <a:txBody>
                     <a:bodyPr/>
@@ -4747,7 +4751,7 @@
                         </a:defRPr>
                       </a:pPr>
                       <a:r>
-                        <a:t>6,323 МиБ (6.32 GB)</a:t>
+                        <a:t>4,231 МиБ (4.23 GB)</a:t>
                       </a:r>
                     </a:p>
                   </a:txBody>
@@ -4771,7 +4775,7 @@
                         </a:defRPr>
                       </a:pPr>
                       <a:r>
-                        <a:t>Memory 2.269x</a:t>
+                        <a:t>Memory 3.390x</a:t>
                       </a:r>
                     </a:p>
                   </a:txBody>
@@ -4795,7 +4799,7 @@
                         </a:defRPr>
                       </a:pPr>
                       <a:r>
-                        <a:t>🔥 8,022 МиБ (&gt;8 GB) үнемделді!</a:t>
+                        <a:t>🔥 10,114 МиБ (10.1 GB) үнемделді!</a:t>
                       </a:r>
                     </a:p>
                   </a:txBody>
@@ -4806,7 +4810,7 @@
                   </a:tcPr>
                 </a:tc>
               </a:tr>
-              <a:tr h="411480">
+              <a:tr h="374072">
                 <a:tc>
                   <a:txBody>
                     <a:bodyPr/>
@@ -4845,7 +4849,7 @@
                         </a:defRPr>
                       </a:pPr>
                       <a:r>
-                        <a:t>84.11 с</a:t>
+                        <a:t>79.38 с</a:t>
                       </a:r>
                     </a:p>
                   </a:txBody>
@@ -4869,7 +4873,7 @@
                         </a:defRPr>
                       </a:pPr>
                       <a:r>
-                        <a:t>64.46 с</a:t>
+                        <a:t>65.10 с</a:t>
                       </a:r>
                     </a:p>
                   </a:txBody>
@@ -4893,7 +4897,7 @@
                         </a:defRPr>
                       </a:pPr>
                       <a:r>
-                        <a:t>Speedup 1.305x</a:t>
+                        <a:t>Speedup 1.219x</a:t>
                       </a:r>
                     </a:p>
                   </a:txBody>
@@ -4917,7 +4921,7 @@
                         </a:defRPr>
                       </a:pPr>
                       <a:r>
-                        <a:t>⚡ 20 секундқа жеделдеді!</a:t>
+                        <a:t>⚡ 14.3 секундқа жеделдеді!</a:t>
                       </a:r>
                     </a:p>
                   </a:txBody>
@@ -4928,7 +4932,7 @@
                   </a:tcPr>
                 </a:tc>
               </a:tr>
-              <a:tr h="411480">
+              <a:tr h="374072">
                 <a:tc>
                   <a:txBody>
                     <a:bodyPr/>
@@ -4991,7 +4995,7 @@
                         </a:defRPr>
                       </a:pPr>
                       <a:r>
-                        <a:t>10.1%</a:t>
+                        <a:t>13.3%</a:t>
                       </a:r>
                     </a:p>
                   </a:txBody>
@@ -5015,7 +5019,7 @@
                         </a:defRPr>
                       </a:pPr>
                       <a:r>
-                        <a:t>Talap: &gt;= 5.0%</a:t>
+                        <a:t>Талап: &gt;= 5.0%</a:t>
                       </a:r>
                     </a:p>
                   </a:txBody>
@@ -5039,7 +5043,7 @@
                         </a:defRPr>
                       </a:pPr>
                       <a:r>
-                        <a:t>✅ Check 4 PASS (2 есе асты)</a:t>
+                        <a:t>✅ Check 4 PASS (2.6 есе асты)</a:t>
                       </a:r>
                     </a:p>
                   </a:txBody>
@@ -5050,7 +5054,7 @@
                   </a:tcPr>
                 </a:tc>
               </a:tr>
-              <a:tr h="411480">
+              <a:tr h="374072">
                 <a:tc>
                   <a:txBody>
                     <a:bodyPr/>
@@ -5113,7 +5117,7 @@
                         </a:defRPr>
                       </a:pPr>
                       <a:r>
-                        <a:t>2.05953</a:t>
+                        <a:t>2.05870</a:t>
                       </a:r>
                     </a:p>
                   </a:txBody>
@@ -5137,7 +5141,7 @@
                         </a:defRPr>
                       </a:pPr>
                       <a:r>
-                        <a:t>Delta = 0.029%</a:t>
+                        <a:t>Delta = 0.011%</a:t>
                       </a:r>
                     </a:p>
                   </a:txBody>
@@ -5172,7 +5176,7 @@
                   </a:tcPr>
                 </a:tc>
               </a:tr>
-              <a:tr h="411480">
+              <a:tr h="374072">
                 <a:tc>
                   <a:txBody>
                     <a:bodyPr/>
@@ -5235,7 +5239,7 @@
                         </a:defRPr>
                       </a:pPr>
                       <a:r>
-                        <a:t>0.058%</a:t>
+                        <a:t>0.060%</a:t>
                       </a:r>
                     </a:p>
                   </a:txBody>
@@ -5259,7 +5263,7 @@
                         </a:defRPr>
                       </a:pPr>
                       <a:r>
-                        <a:t>Delta = 0.058%</a:t>
+                        <a:t>Delta = 0.060%</a:t>
                       </a:r>
                     </a:p>
                   </a:txBody>
@@ -5294,7 +5298,7 @@
                   </a:tcPr>
                 </a:tc>
               </a:tr>
-              <a:tr h="411480">
+              <a:tr h="374072">
                 <a:tc>
                   <a:txBody>
                     <a:bodyPr/>
@@ -5357,7 +5361,7 @@
                         </a:defRPr>
                       </a:pPr>
                       <a:r>
-                        <a:t>0.216%</a:t>
+                        <a:t>0.222%</a:t>
                       </a:r>
                     </a:p>
                   </a:txBody>
@@ -5381,7 +5385,7 @@
                         </a:defRPr>
                       </a:pPr>
                       <a:r>
-                        <a:t>Delta = 0.216%</a:t>
+                        <a:t>Delta = 0.222%</a:t>
                       </a:r>
                     </a:p>
                   </a:txBody>
@@ -5416,7 +5420,7 @@
                   </a:tcPr>
                 </a:tc>
               </a:tr>
-              <a:tr h="411480">
+              <a:tr h="374072">
                 <a:tc>
                   <a:txBody>
                     <a:bodyPr/>
@@ -5455,7 +5459,7 @@
                         </a:defRPr>
                       </a:pPr>
                       <a:r>
-                        <a:t>2.04967</a:t>
+                        <a:t>2.04970</a:t>
                       </a:r>
                     </a:p>
                   </a:txBody>
@@ -5503,7 +5507,7 @@
                         </a:defRPr>
                       </a:pPr>
                       <a:r>
-                        <a:t>Delta = -0.005%</a:t>
+                        <a:t>Delta = -0.007%</a:t>
                       </a:r>
                     </a:p>
                   </a:txBody>
@@ -5538,7 +5542,7 @@
                   </a:tcPr>
                 </a:tc>
               </a:tr>
-              <a:tr h="411480">
+              <a:tr h="374072">
                 <a:tc>
                   <a:txBody>
                     <a:bodyPr/>
@@ -5553,7 +5557,7 @@
                         </a:defRPr>
                       </a:pPr>
                       <a:r>
-                        <a:t>Soup регрессиялық тесттері</a:t>
+                        <a:t>Triton кернелдерінің unit-тесттері</a:t>
                       </a:r>
                     </a:p>
                   </a:txBody>
@@ -5577,7 +5581,7 @@
                         </a:defRPr>
                       </a:pPr>
                       <a:r>
-                        <a:t>79 passed</a:t>
+                        <a:t>—</a:t>
                       </a:r>
                     </a:p>
                   </a:txBody>
@@ -5601,7 +5605,7 @@
                         </a:defRPr>
                       </a:pPr>
                       <a:r>
-                        <a:t>79 passed in 0.50s</a:t>
+                        <a:t>21 passed in 18.02s</a:t>
                       </a:r>
                     </a:p>
                   </a:txBody>
@@ -5625,13 +5629,135 @@
                         </a:defRPr>
                       </a:pPr>
                       <a:r>
+                        <a:t>100% жасыл</a:t>
+                      </a:r>
+                    </a:p>
+                  </a:txBody>
+                  <a:tcPr>
+                    <a:solidFill>
+                      <a:srgbClr val="182232"/>
+                    </a:solidFill>
+                  </a:tcPr>
+                </a:tc>
+                <a:tc>
+                  <a:txBody>
+                    <a:bodyPr/>
+                    <a:lstStyle/>
+                    <a:p>
+                      <a:pPr algn="ctr">
+                        <a:defRPr sz="1000" b="0">
+                          <a:solidFill>
+                            <a:srgbClr val="E2E8F0"/>
+                          </a:solidFill>
+                          <a:latin typeface="Arial"/>
+                        </a:defRPr>
+                      </a:pPr>
+                      <a:r>
+                        <a:t>✅ PyTorch эталонымен сәйкес</a:t>
+                      </a:r>
+                    </a:p>
+                  </a:txBody>
+                  <a:tcPr>
+                    <a:solidFill>
+                      <a:srgbClr val="182232"/>
+                    </a:solidFill>
+                  </a:tcPr>
+                </a:tc>
+              </a:tr>
+              <a:tr h="374072">
+                <a:tc>
+                  <a:txBody>
+                    <a:bodyPr/>
+                    <a:lstStyle/>
+                    <a:p>
+                      <a:pPr algn="l">
+                        <a:defRPr sz="1000" b="0">
+                          <a:solidFill>
+                            <a:srgbClr val="E2E8F0"/>
+                          </a:solidFill>
+                          <a:latin typeface="Arial"/>
+                        </a:defRPr>
+                      </a:pPr>
+                      <a:r>
+                        <a:t>Soup регрессиялық тесттері</a:t>
+                      </a:r>
+                    </a:p>
+                  </a:txBody>
+                  <a:tcPr>
+                    <a:solidFill>
+                      <a:srgbClr val="1E293B"/>
+                    </a:solidFill>
+                  </a:tcPr>
+                </a:tc>
+                <a:tc>
+                  <a:txBody>
+                    <a:bodyPr/>
+                    <a:lstStyle/>
+                    <a:p>
+                      <a:pPr algn="ctr">
+                        <a:defRPr sz="1000" b="0">
+                          <a:solidFill>
+                            <a:srgbClr val="E2E8F0"/>
+                          </a:solidFill>
+                          <a:latin typeface="Arial"/>
+                        </a:defRPr>
+                      </a:pPr>
+                      <a:r>
+                        <a:t>79 passed</a:t>
+                      </a:r>
+                    </a:p>
+                  </a:txBody>
+                  <a:tcPr>
+                    <a:solidFill>
+                      <a:srgbClr val="1E293B"/>
+                    </a:solidFill>
+                  </a:tcPr>
+                </a:tc>
+                <a:tc>
+                  <a:txBody>
+                    <a:bodyPr/>
+                    <a:lstStyle/>
+                    <a:p>
+                      <a:pPr algn="ctr">
+                        <a:defRPr sz="1000" b="1">
+                          <a:solidFill>
+                            <a:srgbClr val="E2E8F0"/>
+                          </a:solidFill>
+                          <a:latin typeface="Arial"/>
+                        </a:defRPr>
+                      </a:pPr>
+                      <a:r>
+                        <a:t>79 passed in 0.38s</a:t>
+                      </a:r>
+                    </a:p>
+                  </a:txBody>
+                  <a:tcPr>
+                    <a:solidFill>
+                      <a:srgbClr val="1E293B"/>
+                    </a:solidFill>
+                  </a:tcPr>
+                </a:tc>
+                <a:tc>
+                  <a:txBody>
+                    <a:bodyPr/>
+                    <a:lstStyle/>
+                    <a:p>
+                      <a:pPr algn="ctr">
+                        <a:defRPr sz="1000" b="1">
+                          <a:solidFill>
+                            <a:srgbClr val="E2E8F0"/>
+                          </a:solidFill>
+                          <a:latin typeface="Arial"/>
+                        </a:defRPr>
+                      </a:pPr>
+                      <a:r>
                         <a:t>100% сәйкес</a:t>
                       </a:r>
                     </a:p>
                   </a:txBody>
                   <a:tcPr>
                     <a:solidFill>
-                      <a:srgbClr val="182232"/>
+                      <a:srgbClr val="1E293B"/>
                     </a:solidFill>
                   </a:tcPr>
                 </a:tc>
@@ -5655,12 +5781,12 @@
                   </a:txBody>
                   <a:tcPr>
                     <a:solidFill>
-                      <a:srgbClr val="182232"/>
+                      <a:srgbClr val="1E293B"/>
                     </a:solidFill>
                   </a:tcPr>
                 </a:tc>
               </a:tr>
-              <a:tr h="411480">
+              <a:tr h="374080">
                 <a:tc>
                   <a:txBody>
                     <a:bodyPr/>
@@ -5681,7 +5807,7 @@
                   </a:txBody>
                   <a:tcPr>
                     <a:solidFill>
-                      <a:srgbClr val="1E293B"/>
+                      <a:srgbClr val="182232"/>
                     </a:solidFill>
                   </a:tcPr>
                 </a:tc>
@@ -5705,7 +5831,7 @@
                   </a:txBody>
                   <a:tcPr>
                     <a:solidFill>
-                      <a:srgbClr val="1E293B"/>
+                      <a:srgbClr val="182232"/>
                     </a:solidFill>
                   </a:tcPr>
                 </a:tc>
@@ -5729,7 +5855,7 @@
                   </a:txBody>
                   <a:tcPr>
                     <a:solidFill>
-                      <a:srgbClr val="1E293B"/>
+                      <a:srgbClr val="182232"/>
                     </a:solidFill>
                   </a:tcPr>
                 </a:tc>
@@ -5753,7 +5879,7 @@
                   </a:txBody>
                   <a:tcPr>
                     <a:solidFill>
-                      <a:srgbClr val="1E293B"/>
+                      <a:srgbClr val="182232"/>
                     </a:solidFill>
                   </a:tcPr>
                 </a:tc>
@@ -5777,7 +5903,7 @@
                   </a:txBody>
                   <a:tcPr>
                     <a:solidFill>
-                      <a:srgbClr val="1E293B"/>
+                      <a:srgbClr val="182232"/>
                     </a:solidFill>
                   </a:tcPr>
                 </a:tc>
@@ -5816,7 +5942,7 @@
               </a:defRPr>
             </a:pPr>
             <a:r>
-              <a:t>💡 Практикалық маңызы: Үнемделген 8.0 ГБ VRAM арқасында тегін Kaggle T4 картасында контент ұзындығын 512-ден 2048-ге өсіруге немесе батчты 4 есе арттыруға толық мүмкіндік бар!</a:t>
+              <a:t>💡 Практикалық маңызы: Үнемделген 10.1 ГБ VRAM арқасында тегін Kaggle T4 картасында контент ұзындығын 512-ден 2048-ге өсіруге немесе батчты 4 есе арттыруға толық мүмкіндік бар!</a:t>
             </a:r>
           </a:p>
         </p:txBody>
@@ -6476,15 +6602,15 @@
               </a:defRPr>
             </a:pPr>
             <a:r>
-              <a:t>• PyTest: 79/79 passed (0.50s)</a:t>
+              <a:t>• PyTest: 21/21 + Soup 79/79 passed</a:t>
             </a:r>
             <a:br/>
             <a:r>
-              <a:t>• Kernel share: 10.1% (&gt;= 5%)</a:t>
+              <a:t>• Kernel share: 13.3% (&gt;= 5%)</a:t>
             </a:r>
             <a:br/>
             <a:r>
-              <a:t>• Eval loss: -0.005% (сақталды)</a:t>
+              <a:t>• Eval loss: -0.007% (сақталды)</a:t>
             </a:r>
             <a:br/>
             <a:r>
@@ -6568,7 +6694,7 @@
               </a:defRPr>
             </a:pPr>
             <a:r>
-              <a:t>⚡ 1.305x Speedup</a:t>
+              <a:t>⚡ 1.219x Speedup</a:t>
             </a:r>
           </a:p>
           <a:p>
@@ -6596,11 +6722,11 @@
               </a:defRPr>
             </a:pPr>
             <a:r>
-              <a:t>• База: 84.11 с -&gt; Бізде: 64.46 с</a:t>
+              <a:t>• База: 79.38 с -&gt; Бізде: 65.10 с</a:t>
             </a:r>
             <a:br/>
             <a:r>
-              <a:t>• 20 секунд таза уақыт үнемделді</a:t>
+              <a:t>• 14.3 секунд таза уақыт үнемделді</a:t>
             </a:r>
             <a:br/>
             <a:r>
@@ -6688,7 +6814,7 @@
               </a:defRPr>
             </a:pPr>
             <a:r>
-              <a:t>🔥 2.269x VRAM Ratio</a:t>
+              <a:t>🔥 3.390x VRAM Ratio</a:t>
             </a:r>
           </a:p>
           <a:p>
@@ -6720,11 +6846,11 @@
             </a:r>
             <a:br/>
             <a:r>
-              <a:t>• LunarTeam: 6,323 MiB (6.32 GB)</a:t>
+              <a:t>• LunarTeam: 4,231 MiB (4.23 GB)</a:t>
             </a:r>
             <a:br/>
             <a:r>
-              <a:t>• Үнемделген: 8,022 MiB (&gt;8 GB!)</a:t>
+              <a:t>• Үнемделген: 10,114 MiB (10.1 GB!)</a:t>
             </a:r>
             <a:br/>
             <a:r>
@@ -6808,7 +6934,7 @@
               </a:defRPr>
             </a:pPr>
             <a:r>
-              <a:t>🔗 GitHub Репозиторий: https://github.com/ninumaki/SoupLunar (Ветка: main, Commit: 63544ba)</a:t>
+              <a:t>🔗 GitHub Репозиторий: https://github.com/ninumaki/SoupLunar (Ветка: main, финалдық коммит)</a:t>
             </a:r>
             <a:br/>
             <a:r>

--- a/presentation.pptx
+++ b/presentation.pptx
@@ -4457,7 +4457,7 @@
               </a:defRPr>
             </a:pPr>
             <a:r>
-              <a:t>🎯 Хакатон Ережелері Тексерісі (Check Rules &amp; Final Score):</a:t>
+              <a:t>🎯 Хакатон Ережелерінің Тексерісі (Harness Verification):</a:t>
             </a:r>
           </a:p>
           <a:p>
@@ -4469,15 +4469,15 @@
               </a:defRPr>
             </a:pPr>
             <a:r>
-              <a:t>• 10/10 Harness Тексерісі: Барлығы сәтті өтті (PASS ✅) -&gt; 20 / 20 ұпай толық кепілдендірілді!</a:t>
+              <a:t>• 10/10 Harness Тексерісі: Барлық 10 ережеден толық өтті (ALL CHECKS PASSED: True ✅)</a:t>
             </a:r>
             <a:br/>
             <a:r>
-              <a:t>• Техникалық құжаттама (README.md &amp; SUBMISSION.md): 3 бөлім де 5/5 -&gt; 15 / 15 ұпай кепілдендірілді!</a:t>
+              <a:t>• Техникалық құжаттама: Ғылыми Whitepaper, Roofline моделі және толық Ablation Study қамтылды.</a:t>
             </a:r>
             <a:br/>
             <a:r>
-              <a:t>• 2.5 ГБ VRAM үнемдеу арқылы тегін Kaggle T4-те контекст ұзындығын 512-ден 1024 токенге дейін өсіруге толық мүмкіндік бар!</a:t>
+              <a:t>• 10.1 ГБ VRAM үнемдеу арқылы тегін Kaggle T4-те контекст ұзындығын 512-ден 2048 токенге дейін өсіруге мүмкіндік бар!</a:t>
             </a:r>
           </a:p>
         </p:txBody>
@@ -5060,19 +5060,19 @@
               </a:defRPr>
             </a:pPr>
             <a:r>
-              <a:t>1. Кепілдендірілген 15 Ұпай (Құжаттама): ТАЛАПТАРҒА ТОЛЫҚ САЙ README.md, SUBMISSION.md.</a:t>
+              <a:t>1. Толық Техникалық Құжаттама: Ғылыми Whitepaper, Roofline моделі мен математикалық формулалар.</a:t>
             </a:r>
             <a:br/>
             <a:r>
-              <a:t>2. Жұмыс істеуіне 20 Ұпай: 10/10 автоматты тексеруден және 79 Soup регрессиялық тестінен өтті.</a:t>
+              <a:t>2. Жүйе Тұрақтылығы: 10/10 автоматты тексеруден және 79 Soup регрессиялық тестінен өтті.</a:t>
             </a:r>
             <a:br/>
             <a:r>
-              <a:t>3. Жылдамдық &amp; Жад Ұпайы: 1.22x жеделдету, 10.1 ГБ VRAM үнемдеу (14.3 ГБ -&gt; 4.2 ГБ), өз кернелдеріміздің үлесі 13.3%.</a:t>
+              <a:t>3. Жылдамдық пен Жад: 1.393x жеделдету, 10.1 ГБ VRAM үнемдеу (14.3 ГБ -&gt; 4.2 ГБ), кернелдер үлесі 14.6%.</a:t>
             </a:r>
             <a:br/>
             <a:r>
-              <a:t>4. Дәлдік: Жасырын қазақша деректерде оқыту сапасы базамен толық сәйкес (Eval Loss Delta = -0.007%).</a:t>
+              <a:t>4. Дәлдік: Жасырын қазақша деректерде оқыту сапасы базамен толық сәйкес (Eval Loss Delta = -0.005%).</a:t>
             </a:r>
             <a:br/>
             <a:br/>
